--- a/6th Semester/Level-3, Semester-II/CCE 323  Optical Fiber Communication/Muradul Boshir/Signal Dispersion 31-3-26.pptx
+++ b/6th Semester/Level-3, Semester-II/CCE 323  Optical Fiber Communication/Muradul Boshir/Signal Dispersion 31-3-26.pptx
@@ -1,14 +1,17 @@
 
 <file path=ppt/presentation.xml><?xml version="1.0" encoding="utf-8"?>
-<p:presentation xmlns:a="http://schemas.openxmlformats.org/drawingml/2006/main" xmlns:r="http://schemas.openxmlformats.org/officeDocument/2006/relationships" xmlns:p="http://schemas.openxmlformats.org/presentationml/2006/main" saveSubsetFonts="1">
+<p:presentation xmlns:a="http://schemas.openxmlformats.org/drawingml/2006/main" xmlns:r="http://schemas.openxmlformats.org/officeDocument/2006/relationships" xmlns:p="http://schemas.openxmlformats.org/presentationml/2006/main" xmlns:m="http://schemas.openxmlformats.org/officeDocument/2006/math" xmlns:w="http://schemas.openxmlformats.org/wordprocessingml/2006/main" saveSubsetFonts="1">
   <p:sldMasterIdLst>
     <p:sldMasterId id="2147483648" r:id="rId1"/>
   </p:sldMasterIdLst>
+  <p:notesMasterIdLst>
+    <p:notesMasterId r:id="rId8"/>
+  </p:notesMasterIdLst>
   <p:sldIdLst>
-    <p:sldId id="256" r:id="rId2"/>
-    <p:sldId id="257" r:id="rId3"/>
-    <p:sldId id="258" r:id="rId4"/>
-    <p:sldId id="259" r:id="rId5"/>
+    <p:sldId id="256" r:id="rId4"/>
+    <p:sldId id="257" r:id="rId5"/>
+    <p:sldId id="258" r:id="rId6"/>
+    <p:sldId id="259" r:id="rId7"/>
   </p:sldIdLst>
   <p:sldSz cx="12192000" cy="6858000"/>
   <p:notesSz cx="6858000" cy="9144000"/>
@@ -16,8 +19,8 @@
     <a:defPPr>
       <a:defRPr lang="en-US"/>
     </a:defPPr>
-    <a:lvl1pPr marL="0" algn="l" defTabSz="914400" rtl="0" eaLnBrk="1" latinLnBrk="0" hangingPunct="1">
-      <a:defRPr sz="1800" kern="1200">
+    <a:lvl1pPr marL="0" algn="l" defTabSz="914400" rtl="0">
+      <a:defRPr sz="1800">
         <a:solidFill>
           <a:schemeClr val="tx1"/>
         </a:solidFill>
@@ -26,8 +29,8 @@
         <a:cs typeface="+mn-cs"/>
       </a:defRPr>
     </a:lvl1pPr>
-    <a:lvl2pPr marL="457200" algn="l" defTabSz="914400" rtl="0" eaLnBrk="1" latinLnBrk="0" hangingPunct="1">
-      <a:defRPr sz="1800" kern="1200">
+    <a:lvl2pPr marL="457200" algn="l" defTabSz="914400" rtl="0">
+      <a:defRPr sz="1800">
         <a:solidFill>
           <a:schemeClr val="tx1"/>
         </a:solidFill>
@@ -36,8 +39,8 @@
         <a:cs typeface="+mn-cs"/>
       </a:defRPr>
     </a:lvl2pPr>
-    <a:lvl3pPr marL="914400" algn="l" defTabSz="914400" rtl="0" eaLnBrk="1" latinLnBrk="0" hangingPunct="1">
-      <a:defRPr sz="1800" kern="1200">
+    <a:lvl3pPr marL="914400" algn="l" defTabSz="914400" rtl="0">
+      <a:defRPr sz="1800">
         <a:solidFill>
           <a:schemeClr val="tx1"/>
         </a:solidFill>
@@ -46,8 +49,8 @@
         <a:cs typeface="+mn-cs"/>
       </a:defRPr>
     </a:lvl3pPr>
-    <a:lvl4pPr marL="1371600" algn="l" defTabSz="914400" rtl="0" eaLnBrk="1" latinLnBrk="0" hangingPunct="1">
-      <a:defRPr sz="1800" kern="1200">
+    <a:lvl4pPr marL="1371600" algn="l" defTabSz="914400" rtl="0">
+      <a:defRPr sz="1800">
         <a:solidFill>
           <a:schemeClr val="tx1"/>
         </a:solidFill>
@@ -56,8 +59,8 @@
         <a:cs typeface="+mn-cs"/>
       </a:defRPr>
     </a:lvl4pPr>
-    <a:lvl5pPr marL="1828800" algn="l" defTabSz="914400" rtl="0" eaLnBrk="1" latinLnBrk="0" hangingPunct="1">
-      <a:defRPr sz="1800" kern="1200">
+    <a:lvl5pPr marL="1828800" algn="l" defTabSz="914400" rtl="0">
+      <a:defRPr sz="1800">
         <a:solidFill>
           <a:schemeClr val="tx1"/>
         </a:solidFill>
@@ -66,8 +69,8 @@
         <a:cs typeface="+mn-cs"/>
       </a:defRPr>
     </a:lvl5pPr>
-    <a:lvl6pPr marL="2286000" algn="l" defTabSz="914400" rtl="0" eaLnBrk="1" latinLnBrk="0" hangingPunct="1">
-      <a:defRPr sz="1800" kern="1200">
+    <a:lvl6pPr marL="2286000" algn="l" defTabSz="914400" rtl="0">
+      <a:defRPr sz="1800">
         <a:solidFill>
           <a:schemeClr val="tx1"/>
         </a:solidFill>
@@ -76,8 +79,8 @@
         <a:cs typeface="+mn-cs"/>
       </a:defRPr>
     </a:lvl6pPr>
-    <a:lvl7pPr marL="2743200" algn="l" defTabSz="914400" rtl="0" eaLnBrk="1" latinLnBrk="0" hangingPunct="1">
-      <a:defRPr sz="1800" kern="1200">
+    <a:lvl7pPr marL="2743200" algn="l" defTabSz="914400" rtl="0">
+      <a:defRPr sz="1800">
         <a:solidFill>
           <a:schemeClr val="tx1"/>
         </a:solidFill>
@@ -86,8 +89,8 @@
         <a:cs typeface="+mn-cs"/>
       </a:defRPr>
     </a:lvl7pPr>
-    <a:lvl8pPr marL="3200400" algn="l" defTabSz="914400" rtl="0" eaLnBrk="1" latinLnBrk="0" hangingPunct="1">
-      <a:defRPr sz="1800" kern="1200">
+    <a:lvl8pPr marL="3200400" algn="l" defTabSz="914400" rtl="0">
+      <a:defRPr sz="1800">
         <a:solidFill>
           <a:schemeClr val="tx1"/>
         </a:solidFill>
@@ -96,8 +99,8 @@
         <a:cs typeface="+mn-cs"/>
       </a:defRPr>
     </a:lvl8pPr>
-    <a:lvl9pPr marL="3657600" algn="l" defTabSz="914400" rtl="0" eaLnBrk="1" latinLnBrk="0" hangingPunct="1">
-      <a:defRPr sz="1800" kern="1200">
+    <a:lvl9pPr marL="3657600" algn="l" defTabSz="914400" rtl="0">
+      <a:defRPr sz="1800">
         <a:solidFill>
           <a:schemeClr val="tx1"/>
         </a:solidFill>
@@ -110,8 +113,668 @@
 </p:presentation>
 </file>
 
+<file path=ppt/notesMasters/notesMaster1.xml><?xml version="1.0" encoding="utf-8"?>
+<p:notesMaster xmlns:a="http://schemas.openxmlformats.org/drawingml/2006/main" xmlns:r="http://schemas.openxmlformats.org/officeDocument/2006/relationships" xmlns:p="http://schemas.openxmlformats.org/presentationml/2006/main">
+  <p:cSld name="">
+    <p:bg>
+      <p:bgRef idx="1001">
+        <a:schemeClr val="bg1"/>
+      </p:bgRef>
+    </p:bg>
+    <p:spTree>
+      <p:nvGrpSpPr>
+        <p:cNvPr id="1" name=""/>
+        <p:cNvGrpSpPr/>
+        <p:nvPr/>
+      </p:nvGrpSpPr>
+      <p:grpSpPr bwMode="auto">
+        <a:xfrm>
+          <a:off x="0" y="0"/>
+          <a:ext cx="0" cy="0"/>
+          <a:chOff x="0" y="0"/>
+          <a:chExt cx="0" cy="0"/>
+        </a:xfrm>
+      </p:grpSpPr>
+      <p:sp>
+        <p:nvSpPr>
+          <p:cNvPr id="2" name="Header Placeholder 1"/>
+          <p:cNvSpPr>
+            <a:spLocks noGrp="1"/>
+          </p:cNvSpPr>
+          <p:nvPr>
+            <p:ph type="hdr" sz="quarter"/>
+          </p:nvPr>
+        </p:nvSpPr>
+        <p:spPr bwMode="auto">
+          <a:xfrm>
+            <a:off x="0" y="0"/>
+            <a:ext cx="2971800" cy="458788"/>
+          </a:xfrm>
+          <a:prstGeom prst="rect">
+            <a:avLst/>
+          </a:prstGeom>
+        </p:spPr>
+        <p:txBody>
+          <a:bodyPr vert="horz" lIns="91440" tIns="45720" rIns="91440" bIns="45720" rtlCol="0" anchor="ctr"/>
+          <a:lstStyle>
+            <a:lvl1pPr algn="l">
+              <a:defRPr sz="1200"/>
+            </a:lvl1pPr>
+          </a:lstStyle>
+          <a:p>
+            <a:pPr>
+              <a:defRPr/>
+            </a:pPr>
+            <a:endParaRPr/>
+          </a:p>
+        </p:txBody>
+      </p:sp>
+      <p:sp>
+        <p:nvSpPr>
+          <p:cNvPr id="3" name="Date Placeholder 2"/>
+          <p:cNvSpPr>
+            <a:spLocks noGrp="1"/>
+          </p:cNvSpPr>
+          <p:nvPr>
+            <p:ph type="dt" idx="2"/>
+          </p:nvPr>
+        </p:nvSpPr>
+        <p:spPr bwMode="auto">
+          <a:xfrm>
+            <a:off x="3884613" y="0"/>
+            <a:ext cx="2971800" cy="458788"/>
+          </a:xfrm>
+          <a:prstGeom prst="rect">
+            <a:avLst/>
+          </a:prstGeom>
+        </p:spPr>
+        <p:txBody>
+          <a:bodyPr vert="horz" lIns="91440" tIns="45720" rIns="91440" bIns="45720" rtlCol="0" anchor="ctr"/>
+          <a:lstStyle>
+            <a:lvl1pPr algn="r">
+              <a:defRPr sz="1200"/>
+            </a:lvl1pPr>
+          </a:lstStyle>
+          <a:p>
+            <a:pPr>
+              <a:defRPr/>
+            </a:pPr>
+            <a:endParaRPr/>
+          </a:p>
+        </p:txBody>
+      </p:sp>
+      <p:sp>
+        <p:nvSpPr>
+          <p:cNvPr id="3" name="Date Placeholder 2"/>
+          <p:cNvSpPr>
+            <a:spLocks noGrp="1"/>
+          </p:cNvSpPr>
+          <p:nvPr>
+            <p:ph type="dt" idx="3"/>
+          </p:nvPr>
+        </p:nvSpPr>
+        <p:spPr bwMode="auto">
+          <a:xfrm>
+            <a:off x="3884613" y="0"/>
+            <a:ext cx="2971800" cy="458788"/>
+          </a:xfrm>
+          <a:prstGeom prst="rect">
+            <a:avLst/>
+          </a:prstGeom>
+        </p:spPr>
+        <p:txBody>
+          <a:bodyPr vert="horz" lIns="91440" tIns="45720" rIns="91440" bIns="45720" rtlCol="0" anchor="ctr"/>
+          <a:lstStyle>
+            <a:lvl1pPr algn="r">
+              <a:defRPr sz="1200"/>
+            </a:lvl1pPr>
+          </a:lstStyle>
+          <a:p>
+            <a:pPr>
+              <a:defRPr/>
+            </a:pPr>
+            <a:endParaRPr/>
+          </a:p>
+        </p:txBody>
+      </p:sp>
+      <p:sp>
+        <p:nvSpPr>
+          <p:cNvPr id="5" name="Notes Placeholder 4"/>
+          <p:cNvSpPr>
+            <a:spLocks noGrp="1"/>
+          </p:cNvSpPr>
+          <p:nvPr>
+            <p:ph type="body" sz="quarter" idx="1"/>
+          </p:nvPr>
+        </p:nvSpPr>
+        <p:spPr bwMode="auto">
+          <a:xfrm>
+            <a:off x="685800" y="4400550"/>
+            <a:ext cx="5486400" cy="3600450"/>
+          </a:xfrm>
+          <a:prstGeom prst="rect">
+            <a:avLst/>
+          </a:prstGeom>
+        </p:spPr>
+        <p:txBody>
+          <a:bodyPr vert="horz" lIns="91440" tIns="45720" rIns="91440" bIns="45720" rtlCol="0" anchor="ctr"/>
+          <a:lstStyle/>
+          <a:p>
+            <a:pPr>
+              <a:defRPr/>
+            </a:pPr>
+            <a:endParaRPr/>
+          </a:p>
+        </p:txBody>
+      </p:sp>
+      <p:sp>
+        <p:nvSpPr>
+          <p:cNvPr id="6" name="Footer Placeholder 5"/>
+          <p:cNvSpPr>
+            <a:spLocks noGrp="1"/>
+          </p:cNvSpPr>
+          <p:nvPr>
+            <p:ph type="ftr" sz="quarter" idx="4"/>
+          </p:nvPr>
+        </p:nvSpPr>
+        <p:spPr bwMode="auto">
+          <a:xfrm>
+            <a:off x="0" y="8685213"/>
+            <a:ext cx="2971800" cy="458787"/>
+          </a:xfrm>
+          <a:prstGeom prst="rect">
+            <a:avLst/>
+          </a:prstGeom>
+        </p:spPr>
+        <p:txBody>
+          <a:bodyPr vert="horz" lIns="91440" tIns="45720" rIns="91440" bIns="45720" rtlCol="0" anchor="b"/>
+          <a:lstStyle>
+            <a:lvl1pPr algn="l">
+              <a:defRPr sz="1200"/>
+            </a:lvl1pPr>
+          </a:lstStyle>
+          <a:p>
+            <a:pPr>
+              <a:defRPr/>
+            </a:pPr>
+            <a:endParaRPr/>
+          </a:p>
+        </p:txBody>
+      </p:sp>
+      <p:sp>
+        <p:nvSpPr>
+          <p:cNvPr id="7" name="Slide Number Placeholder 6"/>
+          <p:cNvSpPr>
+            <a:spLocks noGrp="1"/>
+          </p:cNvSpPr>
+          <p:nvPr>
+            <p:ph type="sldNum" sz="quarter" idx="10"/>
+          </p:nvPr>
+        </p:nvSpPr>
+        <p:spPr bwMode="auto">
+          <a:xfrm>
+            <a:off x="3884613" y="8685213"/>
+            <a:ext cx="2971800" cy="458787"/>
+          </a:xfrm>
+          <a:prstGeom prst="rect">
+            <a:avLst/>
+          </a:prstGeom>
+        </p:spPr>
+        <p:txBody>
+          <a:bodyPr vert="horz" lIns="91440" tIns="45720" rIns="91440" bIns="45720" rtlCol="0" anchor="b"/>
+          <a:lstStyle>
+            <a:lvl1pPr algn="r">
+              <a:defRPr sz="1200"/>
+            </a:lvl1pPr>
+          </a:lstStyle>
+          <a:p>
+            <a:pPr>
+              <a:defRPr/>
+            </a:pPr>
+            <a:endParaRPr/>
+          </a:p>
+        </p:txBody>
+      </p:sp>
+    </p:spTree>
+  </p:cSld>
+  <p:clrMap bg1="lt1" tx1="dk1" bg2="lt2" tx2="dk2" accent1="accent1" accent2="accent2" accent3="accent3" accent4="accent4" accent5="accent5" accent6="accent6" hlink="hlink" folHlink="folHlink"/>
+  <p:notesStyle>
+    <a:lvl1pPr marL="0" algn="l" defTabSz="914400">
+      <a:defRPr sz="1200">
+        <a:solidFill>
+          <a:schemeClr val="tx1"/>
+        </a:solidFill>
+        <a:latin typeface="+mn-lt"/>
+        <a:ea typeface="+mn-ea"/>
+        <a:cs typeface="+mn-cs"/>
+      </a:defRPr>
+    </a:lvl1pPr>
+    <a:lvl2pPr marL="457200" algn="l" defTabSz="914400">
+      <a:defRPr sz="1200">
+        <a:solidFill>
+          <a:schemeClr val="tx1"/>
+        </a:solidFill>
+        <a:latin typeface="+mn-lt"/>
+        <a:ea typeface="+mn-ea"/>
+        <a:cs typeface="+mn-cs"/>
+      </a:defRPr>
+    </a:lvl2pPr>
+    <a:lvl3pPr marL="914400" algn="l" defTabSz="914400">
+      <a:defRPr sz="1200">
+        <a:solidFill>
+          <a:schemeClr val="tx1"/>
+        </a:solidFill>
+        <a:latin typeface="+mn-lt"/>
+        <a:ea typeface="+mn-ea"/>
+        <a:cs typeface="+mn-cs"/>
+      </a:defRPr>
+    </a:lvl3pPr>
+    <a:lvl4pPr marL="1371600" algn="l" defTabSz="914400">
+      <a:defRPr sz="1200">
+        <a:solidFill>
+          <a:schemeClr val="tx1"/>
+        </a:solidFill>
+        <a:latin typeface="+mn-lt"/>
+        <a:ea typeface="+mn-ea"/>
+        <a:cs typeface="+mn-cs"/>
+      </a:defRPr>
+    </a:lvl4pPr>
+    <a:lvl5pPr marL="1828800" algn="l" defTabSz="914400">
+      <a:defRPr sz="1200">
+        <a:solidFill>
+          <a:schemeClr val="tx1"/>
+        </a:solidFill>
+        <a:latin typeface="+mn-lt"/>
+        <a:ea typeface="+mn-ea"/>
+        <a:cs typeface="+mn-cs"/>
+      </a:defRPr>
+    </a:lvl5pPr>
+    <a:lvl6pPr marL="2286000" algn="l" defTabSz="914400">
+      <a:defRPr sz="1200">
+        <a:solidFill>
+          <a:schemeClr val="tx1"/>
+        </a:solidFill>
+        <a:latin typeface="+mn-lt"/>
+        <a:ea typeface="+mn-ea"/>
+        <a:cs typeface="+mn-cs"/>
+      </a:defRPr>
+    </a:lvl6pPr>
+    <a:lvl7pPr marL="2743200" algn="l" defTabSz="914400">
+      <a:defRPr sz="1200">
+        <a:solidFill>
+          <a:schemeClr val="tx1"/>
+        </a:solidFill>
+        <a:latin typeface="+mn-lt"/>
+        <a:ea typeface="+mn-ea"/>
+        <a:cs typeface="+mn-cs"/>
+      </a:defRPr>
+    </a:lvl7pPr>
+    <a:lvl8pPr marL="3200400" algn="l" defTabSz="914400">
+      <a:defRPr sz="1200">
+        <a:solidFill>
+          <a:schemeClr val="tx1"/>
+        </a:solidFill>
+        <a:latin typeface="+mn-lt"/>
+        <a:ea typeface="+mn-ea"/>
+        <a:cs typeface="+mn-cs"/>
+      </a:defRPr>
+    </a:lvl8pPr>
+    <a:lvl9pPr marL="3657600" algn="l" defTabSz="914400">
+      <a:defRPr sz="1200">
+        <a:solidFill>
+          <a:schemeClr val="tx1"/>
+        </a:solidFill>
+        <a:latin typeface="+mn-lt"/>
+        <a:ea typeface="+mn-ea"/>
+        <a:cs typeface="+mn-cs"/>
+      </a:defRPr>
+    </a:lvl9pPr>
+  </p:notesStyle>
+</p:notesMaster>
+</file>
+
+<file path=ppt/notesSlides/notesSlide1.xml><?xml version="1.0" encoding="utf-8"?>
+<p:notes xmlns:a="http://schemas.openxmlformats.org/drawingml/2006/main" xmlns:r="http://schemas.openxmlformats.org/officeDocument/2006/relationships" xmlns:p="http://schemas.openxmlformats.org/presentationml/2006/main" xmlns:m="http://schemas.openxmlformats.org/officeDocument/2006/math" xmlns:w="http://schemas.openxmlformats.org/wordprocessingml/2006/main">
+  <p:cSld name="">
+    <p:spTree>
+      <p:nvGrpSpPr>
+        <p:cNvPr id="1" name=""/>
+        <p:cNvGrpSpPr/>
+        <p:nvPr/>
+      </p:nvGrpSpPr>
+      <p:grpSpPr bwMode="auto">
+        <a:xfrm>
+          <a:off x="0" y="0"/>
+          <a:ext cx="0" cy="0"/>
+          <a:chOff x="0" y="0"/>
+          <a:chExt cx="0" cy="0"/>
+        </a:xfrm>
+      </p:grpSpPr>
+      <p:sp>
+        <p:nvSpPr>
+          <p:cNvPr id="2" name="Slide Image Placeholder 1"/>
+          <p:cNvSpPr>
+            <a:spLocks noChangeAspect="1" noGrp="1" noRot="1"/>
+          </p:cNvSpPr>
+          <p:nvPr>
+            <p:ph type="sldImg"/>
+          </p:nvPr>
+        </p:nvSpPr>
+        <p:spPr bwMode="auto"/>
+      </p:sp>
+      <p:sp>
+        <p:nvSpPr>
+          <p:cNvPr id="3" name="Notes Placeholder 2"/>
+          <p:cNvSpPr>
+            <a:spLocks noGrp="1"/>
+          </p:cNvSpPr>
+          <p:nvPr>
+            <p:ph type="body" idx="1"/>
+          </p:nvPr>
+        </p:nvSpPr>
+        <p:spPr bwMode="auto"/>
+        <p:txBody>
+          <a:bodyPr/>
+          <a:lstStyle/>
+          <a:p>
+            <a:pPr>
+              <a:defRPr/>
+            </a:pPr>
+            <a:endParaRPr/>
+          </a:p>
+        </p:txBody>
+      </p:sp>
+      <p:sp>
+        <p:nvSpPr>
+          <p:cNvPr id="4" name="Slide Number Placeholder 3"/>
+          <p:cNvSpPr>
+            <a:spLocks noGrp="1"/>
+          </p:cNvSpPr>
+          <p:nvPr>
+            <p:ph type="sldNum" sz="quarter" idx="10"/>
+          </p:nvPr>
+        </p:nvSpPr>
+        <p:spPr bwMode="auto"/>
+        <p:txBody>
+          <a:bodyPr/>
+          <a:lstStyle/>
+          <a:p>
+            <a:pPr>
+              <a:defRPr/>
+            </a:pPr>
+            <a:fld id="{63C46095-DDC4-FFBD-9BE4-D6AF413EF022}" type="slidenum">
+              <a:rPr/>
+              <a:t/>
+            </a:fld>
+            <a:endParaRPr/>
+          </a:p>
+        </p:txBody>
+      </p:sp>
+    </p:spTree>
+  </p:cSld>
+  <p:clrMapOvr>
+    <a:masterClrMapping/>
+  </p:clrMapOvr>
+</p:notes>
+</file>
+
+<file path=ppt/notesSlides/notesSlide2.xml><?xml version="1.0" encoding="utf-8"?>
+<p:notes xmlns:a="http://schemas.openxmlformats.org/drawingml/2006/main" xmlns:r="http://schemas.openxmlformats.org/officeDocument/2006/relationships" xmlns:p="http://schemas.openxmlformats.org/presentationml/2006/main" xmlns:m="http://schemas.openxmlformats.org/officeDocument/2006/math" xmlns:w="http://schemas.openxmlformats.org/wordprocessingml/2006/main">
+  <p:cSld name="">
+    <p:spTree>
+      <p:nvGrpSpPr>
+        <p:cNvPr id="1" name=""/>
+        <p:cNvGrpSpPr/>
+        <p:nvPr/>
+      </p:nvGrpSpPr>
+      <p:grpSpPr bwMode="auto">
+        <a:xfrm>
+          <a:off x="0" y="0"/>
+          <a:ext cx="0" cy="0"/>
+          <a:chOff x="0" y="0"/>
+          <a:chExt cx="0" cy="0"/>
+        </a:xfrm>
+      </p:grpSpPr>
+      <p:sp>
+        <p:nvSpPr>
+          <p:cNvPr id="2" name="Slide Image Placeholder 1"/>
+          <p:cNvSpPr>
+            <a:spLocks noChangeAspect="1" noGrp="1" noRot="1"/>
+          </p:cNvSpPr>
+          <p:nvPr>
+            <p:ph type="sldImg"/>
+          </p:nvPr>
+        </p:nvSpPr>
+        <p:spPr bwMode="auto"/>
+      </p:sp>
+      <p:sp>
+        <p:nvSpPr>
+          <p:cNvPr id="3" name="Notes Placeholder 2"/>
+          <p:cNvSpPr>
+            <a:spLocks noGrp="1"/>
+          </p:cNvSpPr>
+          <p:nvPr>
+            <p:ph type="body" idx="1"/>
+          </p:nvPr>
+        </p:nvSpPr>
+        <p:spPr bwMode="auto"/>
+        <p:txBody>
+          <a:bodyPr/>
+          <a:lstStyle/>
+          <a:p>
+            <a:pPr>
+              <a:defRPr/>
+            </a:pPr>
+            <a:endParaRPr/>
+          </a:p>
+        </p:txBody>
+      </p:sp>
+      <p:sp>
+        <p:nvSpPr>
+          <p:cNvPr id="4" name="Slide Number Placeholder 3"/>
+          <p:cNvSpPr>
+            <a:spLocks noGrp="1"/>
+          </p:cNvSpPr>
+          <p:nvPr>
+            <p:ph type="sldNum" sz="quarter" idx="10"/>
+          </p:nvPr>
+        </p:nvSpPr>
+        <p:spPr bwMode="auto"/>
+        <p:txBody>
+          <a:bodyPr/>
+          <a:lstStyle/>
+          <a:p>
+            <a:pPr>
+              <a:defRPr/>
+            </a:pPr>
+            <a:fld id="{09E0F4F1-6208-12A5-658C-64D5B4445EB9}" type="slidenum">
+              <a:rPr/>
+              <a:t/>
+            </a:fld>
+            <a:endParaRPr/>
+          </a:p>
+        </p:txBody>
+      </p:sp>
+    </p:spTree>
+  </p:cSld>
+  <p:clrMapOvr>
+    <a:masterClrMapping/>
+  </p:clrMapOvr>
+</p:notes>
+</file>
+
+<file path=ppt/notesSlides/notesSlide3.xml><?xml version="1.0" encoding="utf-8"?>
+<p:notes xmlns:a="http://schemas.openxmlformats.org/drawingml/2006/main" xmlns:r="http://schemas.openxmlformats.org/officeDocument/2006/relationships" xmlns:p="http://schemas.openxmlformats.org/presentationml/2006/main" xmlns:m="http://schemas.openxmlformats.org/officeDocument/2006/math" xmlns:w="http://schemas.openxmlformats.org/wordprocessingml/2006/main">
+  <p:cSld name="">
+    <p:spTree>
+      <p:nvGrpSpPr>
+        <p:cNvPr id="1" name=""/>
+        <p:cNvGrpSpPr/>
+        <p:nvPr/>
+      </p:nvGrpSpPr>
+      <p:grpSpPr bwMode="auto">
+        <a:xfrm>
+          <a:off x="0" y="0"/>
+          <a:ext cx="0" cy="0"/>
+          <a:chOff x="0" y="0"/>
+          <a:chExt cx="0" cy="0"/>
+        </a:xfrm>
+      </p:grpSpPr>
+      <p:sp>
+        <p:nvSpPr>
+          <p:cNvPr id="2" name="Slide Image Placeholder 1"/>
+          <p:cNvSpPr>
+            <a:spLocks noChangeAspect="1" noGrp="1" noRot="1"/>
+          </p:cNvSpPr>
+          <p:nvPr>
+            <p:ph type="sldImg"/>
+          </p:nvPr>
+        </p:nvSpPr>
+        <p:spPr bwMode="auto"/>
+      </p:sp>
+      <p:sp>
+        <p:nvSpPr>
+          <p:cNvPr id="3" name="Notes Placeholder 2"/>
+          <p:cNvSpPr>
+            <a:spLocks noGrp="1"/>
+          </p:cNvSpPr>
+          <p:nvPr>
+            <p:ph type="body" idx="1"/>
+          </p:nvPr>
+        </p:nvSpPr>
+        <p:spPr bwMode="auto"/>
+        <p:txBody>
+          <a:bodyPr/>
+          <a:lstStyle/>
+          <a:p>
+            <a:pPr>
+              <a:defRPr/>
+            </a:pPr>
+            <a:endParaRPr/>
+          </a:p>
+        </p:txBody>
+      </p:sp>
+      <p:sp>
+        <p:nvSpPr>
+          <p:cNvPr id="4" name="Slide Number Placeholder 3"/>
+          <p:cNvSpPr>
+            <a:spLocks noGrp="1"/>
+          </p:cNvSpPr>
+          <p:nvPr>
+            <p:ph type="sldNum" sz="quarter" idx="10"/>
+          </p:nvPr>
+        </p:nvSpPr>
+        <p:spPr bwMode="auto"/>
+        <p:txBody>
+          <a:bodyPr/>
+          <a:lstStyle/>
+          <a:p>
+            <a:pPr>
+              <a:defRPr/>
+            </a:pPr>
+            <a:fld id="{B7B43D7B-6A1B-41BF-E49D-8D45CAE781E4}" type="slidenum">
+              <a:rPr/>
+              <a:t/>
+            </a:fld>
+            <a:endParaRPr/>
+          </a:p>
+        </p:txBody>
+      </p:sp>
+    </p:spTree>
+  </p:cSld>
+  <p:clrMapOvr>
+    <a:masterClrMapping/>
+  </p:clrMapOvr>
+</p:notes>
+</file>
+
+<file path=ppt/notesSlides/notesSlide4.xml><?xml version="1.0" encoding="utf-8"?>
+<p:notes xmlns:a="http://schemas.openxmlformats.org/drawingml/2006/main" xmlns:r="http://schemas.openxmlformats.org/officeDocument/2006/relationships" xmlns:p="http://schemas.openxmlformats.org/presentationml/2006/main" xmlns:m="http://schemas.openxmlformats.org/officeDocument/2006/math" xmlns:w="http://schemas.openxmlformats.org/wordprocessingml/2006/main">
+  <p:cSld name="">
+    <p:spTree>
+      <p:nvGrpSpPr>
+        <p:cNvPr id="1" name=""/>
+        <p:cNvGrpSpPr/>
+        <p:nvPr/>
+      </p:nvGrpSpPr>
+      <p:grpSpPr bwMode="auto">
+        <a:xfrm>
+          <a:off x="0" y="0"/>
+          <a:ext cx="0" cy="0"/>
+          <a:chOff x="0" y="0"/>
+          <a:chExt cx="0" cy="0"/>
+        </a:xfrm>
+      </p:grpSpPr>
+      <p:sp>
+        <p:nvSpPr>
+          <p:cNvPr id="2" name="Slide Image Placeholder 1"/>
+          <p:cNvSpPr>
+            <a:spLocks noChangeAspect="1" noGrp="1" noRot="1"/>
+          </p:cNvSpPr>
+          <p:nvPr>
+            <p:ph type="sldImg"/>
+          </p:nvPr>
+        </p:nvSpPr>
+        <p:spPr bwMode="auto"/>
+      </p:sp>
+      <p:sp>
+        <p:nvSpPr>
+          <p:cNvPr id="3" name="Notes Placeholder 2"/>
+          <p:cNvSpPr>
+            <a:spLocks noGrp="1"/>
+          </p:cNvSpPr>
+          <p:nvPr>
+            <p:ph type="body" idx="1"/>
+          </p:nvPr>
+        </p:nvSpPr>
+        <p:spPr bwMode="auto"/>
+        <p:txBody>
+          <a:bodyPr/>
+          <a:lstStyle/>
+          <a:p>
+            <a:pPr>
+              <a:defRPr/>
+            </a:pPr>
+            <a:endParaRPr/>
+          </a:p>
+        </p:txBody>
+      </p:sp>
+      <p:sp>
+        <p:nvSpPr>
+          <p:cNvPr id="4" name="Slide Number Placeholder 3"/>
+          <p:cNvSpPr>
+            <a:spLocks noGrp="1"/>
+          </p:cNvSpPr>
+          <p:nvPr>
+            <p:ph type="sldNum" sz="quarter" idx="10"/>
+          </p:nvPr>
+        </p:nvSpPr>
+        <p:spPr bwMode="auto"/>
+        <p:txBody>
+          <a:bodyPr/>
+          <a:lstStyle/>
+          <a:p>
+            <a:pPr>
+              <a:defRPr/>
+            </a:pPr>
+            <a:fld id="{F6ACAEE0-CED8-549E-DBB5-AFE2CCA54443}" type="slidenum">
+              <a:rPr/>
+              <a:t/>
+            </a:fld>
+            <a:endParaRPr/>
+          </a:p>
+        </p:txBody>
+      </p:sp>
+    </p:spTree>
+  </p:cSld>
+  <p:clrMapOvr>
+    <a:masterClrMapping/>
+  </p:clrMapOvr>
+</p:notes>
+</file>
+
 <file path=ppt/slideLayouts/slideLayout1.xml><?xml version="1.0" encoding="utf-8"?>
-<p:sldLayout xmlns:a="http://schemas.openxmlformats.org/drawingml/2006/main" xmlns:r="http://schemas.openxmlformats.org/officeDocument/2006/relationships" xmlns:p="http://schemas.openxmlformats.org/presentationml/2006/main" type="title" preserve="1">
+<p:sldLayout xmlns:a="http://schemas.openxmlformats.org/drawingml/2006/main" xmlns:r="http://schemas.openxmlformats.org/officeDocument/2006/relationships" xmlns:p="http://schemas.openxmlformats.org/presentationml/2006/main" xmlns:m="http://schemas.openxmlformats.org/officeDocument/2006/math" xmlns:w="http://schemas.openxmlformats.org/wordprocessingml/2006/main" matchingName="" preserve="1" showMasterPhAnim="0" showMasterSp="1" type="title" userDrawn="1">
   <p:cSld name="Title Slide">
     <p:spTree>
       <p:nvGrpSpPr>
@@ -119,7 +782,7 @@
         <p:cNvGrpSpPr/>
         <p:nvPr/>
       </p:nvGrpSpPr>
-      <p:grpSpPr>
+      <p:grpSpPr bwMode="auto">
         <a:xfrm>
           <a:off x="0" y="0"/>
           <a:ext cx="0" cy="0"/>
@@ -129,7 +792,7 @@
       </p:grpSpPr>
       <p:sp>
         <p:nvSpPr>
-          <p:cNvPr id="2" name="Title 1"/>
+          <p:cNvPr id="1491815753" name="Title 1"/>
           <p:cNvSpPr>
             <a:spLocks noGrp="1"/>
           </p:cNvSpPr>
@@ -137,7 +800,7 @@
             <p:ph type="ctrTitle"/>
           </p:nvPr>
         </p:nvSpPr>
-        <p:spPr>
+        <p:spPr bwMode="auto">
           <a:xfrm>
             <a:off x="1524000" y="1122363"/>
             <a:ext cx="9144000" cy="2387600"/>
@@ -151,8 +814,11 @@
             </a:lvl1pPr>
           </a:lstStyle>
           <a:p>
-            <a:r>
-              <a:rPr lang="en-US" smtClean="0"/>
+            <a:pPr>
+              <a:defRPr/>
+            </a:pPr>
+            <a:r>
+              <a:rPr lang="en-US"/>
               <a:t>Click to edit Master title style</a:t>
             </a:r>
             <a:endParaRPr lang="en-US"/>
@@ -161,7 +827,7 @@
       </p:sp>
       <p:sp>
         <p:nvSpPr>
-          <p:cNvPr id="3" name="Subtitle 2"/>
+          <p:cNvPr id="831460420" name="Subtitle 2"/>
           <p:cNvSpPr>
             <a:spLocks noGrp="1"/>
           </p:cNvSpPr>
@@ -169,7 +835,7 @@
             <p:ph type="subTitle" idx="1"/>
           </p:nvPr>
         </p:nvSpPr>
-        <p:spPr>
+        <p:spPr bwMode="auto">
           <a:xfrm>
             <a:off x="1524000" y="3602038"/>
             <a:ext cx="9144000" cy="1655762"/>
@@ -216,8 +882,11 @@
             </a:lvl9pPr>
           </a:lstStyle>
           <a:p>
-            <a:r>
-              <a:rPr lang="en-US" smtClean="0"/>
+            <a:pPr>
+              <a:defRPr/>
+            </a:pPr>
+            <a:r>
+              <a:rPr lang="en-US"/>
               <a:t>Click to edit Master subtitle style</a:t>
             </a:r>
             <a:endParaRPr lang="en-US"/>
@@ -226,7 +895,7 @@
       </p:sp>
       <p:sp>
         <p:nvSpPr>
-          <p:cNvPr id="4" name="Date Placeholder 3"/>
+          <p:cNvPr id="598379477" name="Date Placeholder 3"/>
           <p:cNvSpPr>
             <a:spLocks noGrp="1"/>
           </p:cNvSpPr>
@@ -234,13 +903,16 @@
             <p:ph type="dt" sz="half" idx="10"/>
           </p:nvPr>
         </p:nvSpPr>
-        <p:spPr/>
-        <p:txBody>
-          <a:bodyPr/>
-          <a:lstStyle/>
-          <a:p>
+        <p:spPr bwMode="auto"/>
+        <p:txBody>
+          <a:bodyPr/>
+          <a:lstStyle/>
+          <a:p>
+            <a:pPr>
+              <a:defRPr/>
+            </a:pPr>
             <a:fld id="{98CC69C8-8B53-4FDF-AAB7-FE39925D3764}" type="datetimeFigureOut">
-              <a:rPr lang="en-US" smtClean="0"/>
+              <a:rPr lang="en-US"/>
               <a:t>3/31/2026</a:t>
             </a:fld>
             <a:endParaRPr lang="en-US"/>
@@ -249,7 +921,7 @@
       </p:sp>
       <p:sp>
         <p:nvSpPr>
-          <p:cNvPr id="5" name="Footer Placeholder 4"/>
+          <p:cNvPr id="2124257728" name="Footer Placeholder 4"/>
           <p:cNvSpPr>
             <a:spLocks noGrp="1"/>
           </p:cNvSpPr>
@@ -257,18 +929,21 @@
             <p:ph type="ftr" sz="quarter" idx="11"/>
           </p:nvPr>
         </p:nvSpPr>
-        <p:spPr/>
-        <p:txBody>
-          <a:bodyPr/>
-          <a:lstStyle/>
-          <a:p>
-            <a:endParaRPr lang="en-US"/>
-          </a:p>
-        </p:txBody>
-      </p:sp>
-      <p:sp>
-        <p:nvSpPr>
-          <p:cNvPr id="6" name="Slide Number Placeholder 5"/>
+        <p:spPr bwMode="auto"/>
+        <p:txBody>
+          <a:bodyPr/>
+          <a:lstStyle/>
+          <a:p>
+            <a:pPr>
+              <a:defRPr/>
+            </a:pPr>
+            <a:endParaRPr lang="en-US"/>
+          </a:p>
+        </p:txBody>
+      </p:sp>
+      <p:sp>
+        <p:nvSpPr>
+          <p:cNvPr id="1003481421" name="Slide Number Placeholder 5"/>
           <p:cNvSpPr>
             <a:spLocks noGrp="1"/>
           </p:cNvSpPr>
@@ -276,13 +951,16 @@
             <p:ph type="sldNum" sz="quarter" idx="12"/>
           </p:nvPr>
         </p:nvSpPr>
-        <p:spPr/>
-        <p:txBody>
-          <a:bodyPr/>
-          <a:lstStyle/>
-          <a:p>
+        <p:spPr bwMode="auto"/>
+        <p:txBody>
+          <a:bodyPr/>
+          <a:lstStyle/>
+          <a:p>
+            <a:pPr>
+              <a:defRPr/>
+            </a:pPr>
             <a:fld id="{F6B844F4-D5BB-4B6C-9919-0766FCF7BAC1}" type="slidenum">
-              <a:rPr lang="en-US" smtClean="0"/>
+              <a:rPr lang="en-US"/>
               <a:t>‹#›</a:t>
             </a:fld>
             <a:endParaRPr lang="en-US"/>
@@ -290,11 +968,6 @@
         </p:txBody>
       </p:sp>
     </p:spTree>
-    <p:extLst>
-      <p:ext uri="{BB962C8B-B14F-4D97-AF65-F5344CB8AC3E}">
-        <p14:creationId xmlns:p14="http://schemas.microsoft.com/office/powerpoint/2010/main" val="2267042008"/>
-      </p:ext>
-    </p:extLst>
   </p:cSld>
   <p:clrMapOvr>
     <a:masterClrMapping/>
@@ -303,7 +976,7 @@
 </file>
 
 <file path=ppt/slideLayouts/slideLayout10.xml><?xml version="1.0" encoding="utf-8"?>
-<p:sldLayout xmlns:a="http://schemas.openxmlformats.org/drawingml/2006/main" xmlns:r="http://schemas.openxmlformats.org/officeDocument/2006/relationships" xmlns:p="http://schemas.openxmlformats.org/presentationml/2006/main" type="vertTx" preserve="1">
+<p:sldLayout xmlns:a="http://schemas.openxmlformats.org/drawingml/2006/main" xmlns:r="http://schemas.openxmlformats.org/officeDocument/2006/relationships" xmlns:p="http://schemas.openxmlformats.org/presentationml/2006/main" xmlns:m="http://schemas.openxmlformats.org/officeDocument/2006/math" xmlns:w="http://schemas.openxmlformats.org/wordprocessingml/2006/main" matchingName="" preserve="1" showMasterPhAnim="0" showMasterSp="1" type="vertTx" userDrawn="1">
   <p:cSld name="Title and Vertical Text">
     <p:spTree>
       <p:nvGrpSpPr>
@@ -311,7 +984,7 @@
         <p:cNvGrpSpPr/>
         <p:nvPr/>
       </p:nvGrpSpPr>
-      <p:grpSpPr>
+      <p:grpSpPr bwMode="auto">
         <a:xfrm>
           <a:off x="0" y="0"/>
           <a:ext cx="0" cy="0"/>
@@ -321,7 +994,7 @@
       </p:grpSpPr>
       <p:sp>
         <p:nvSpPr>
-          <p:cNvPr id="2" name="Title 1"/>
+          <p:cNvPr id="1597966392" name="Title 1"/>
           <p:cNvSpPr>
             <a:spLocks noGrp="1"/>
           </p:cNvSpPr>
@@ -329,13 +1002,16 @@
             <p:ph type="title"/>
           </p:nvPr>
         </p:nvSpPr>
-        <p:spPr/>
-        <p:txBody>
-          <a:bodyPr/>
-          <a:lstStyle/>
-          <a:p>
-            <a:r>
-              <a:rPr lang="en-US" smtClean="0"/>
+        <p:spPr bwMode="auto"/>
+        <p:txBody>
+          <a:bodyPr/>
+          <a:lstStyle/>
+          <a:p>
+            <a:pPr>
+              <a:defRPr/>
+            </a:pPr>
+            <a:r>
+              <a:rPr lang="en-US"/>
               <a:t>Click to edit Master title style</a:t>
             </a:r>
             <a:endParaRPr lang="en-US"/>
@@ -344,7 +1020,7 @@
       </p:sp>
       <p:sp>
         <p:nvSpPr>
-          <p:cNvPr id="3" name="Vertical Text Placeholder 2"/>
+          <p:cNvPr id="906559008" name="Vertical Text Placeholder 2"/>
           <p:cNvSpPr>
             <a:spLocks noGrp="1"/>
           </p:cNvSpPr>
@@ -352,42 +1028,56 @@
             <p:ph type="body" orient="vert" idx="1"/>
           </p:nvPr>
         </p:nvSpPr>
-        <p:spPr/>
+        <p:spPr bwMode="auto"/>
         <p:txBody>
           <a:bodyPr vert="eaVert"/>
           <a:lstStyle/>
           <a:p>
-            <a:pPr lvl="0"/>
-            <a:r>
-              <a:rPr lang="en-US" smtClean="0"/>
+            <a:pPr lvl="0">
+              <a:defRPr/>
+            </a:pPr>
+            <a:r>
+              <a:rPr lang="en-US"/>
               <a:t>Edit Master text styles</a:t>
             </a:r>
-          </a:p>
-          <a:p>
-            <a:pPr lvl="1"/>
-            <a:r>
-              <a:rPr lang="en-US" smtClean="0"/>
+            <a:endParaRPr/>
+          </a:p>
+          <a:p>
+            <a:pPr lvl="1">
+              <a:defRPr/>
+            </a:pPr>
+            <a:r>
+              <a:rPr lang="en-US"/>
               <a:t>Second level</a:t>
             </a:r>
-          </a:p>
-          <a:p>
-            <a:pPr lvl="2"/>
-            <a:r>
-              <a:rPr lang="en-US" smtClean="0"/>
+            <a:endParaRPr/>
+          </a:p>
+          <a:p>
+            <a:pPr lvl="2">
+              <a:defRPr/>
+            </a:pPr>
+            <a:r>
+              <a:rPr lang="en-US"/>
               <a:t>Third level</a:t>
             </a:r>
-          </a:p>
-          <a:p>
-            <a:pPr lvl="3"/>
-            <a:r>
-              <a:rPr lang="en-US" smtClean="0"/>
+            <a:endParaRPr/>
+          </a:p>
+          <a:p>
+            <a:pPr lvl="3">
+              <a:defRPr/>
+            </a:pPr>
+            <a:r>
+              <a:rPr lang="en-US"/>
               <a:t>Fourth level</a:t>
             </a:r>
-          </a:p>
-          <a:p>
-            <a:pPr lvl="4"/>
-            <a:r>
-              <a:rPr lang="en-US" smtClean="0"/>
+            <a:endParaRPr/>
+          </a:p>
+          <a:p>
+            <a:pPr lvl="4">
+              <a:defRPr/>
+            </a:pPr>
+            <a:r>
+              <a:rPr lang="en-US"/>
               <a:t>Fifth level</a:t>
             </a:r>
             <a:endParaRPr lang="en-US"/>
@@ -396,7 +1086,7 @@
       </p:sp>
       <p:sp>
         <p:nvSpPr>
-          <p:cNvPr id="4" name="Date Placeholder 3"/>
+          <p:cNvPr id="670655201" name="Date Placeholder 3"/>
           <p:cNvSpPr>
             <a:spLocks noGrp="1"/>
           </p:cNvSpPr>
@@ -404,13 +1094,16 @@
             <p:ph type="dt" sz="half" idx="10"/>
           </p:nvPr>
         </p:nvSpPr>
-        <p:spPr/>
-        <p:txBody>
-          <a:bodyPr/>
-          <a:lstStyle/>
-          <a:p>
+        <p:spPr bwMode="auto"/>
+        <p:txBody>
+          <a:bodyPr/>
+          <a:lstStyle/>
+          <a:p>
+            <a:pPr>
+              <a:defRPr/>
+            </a:pPr>
             <a:fld id="{98CC69C8-8B53-4FDF-AAB7-FE39925D3764}" type="datetimeFigureOut">
-              <a:rPr lang="en-US" smtClean="0"/>
+              <a:rPr lang="en-US"/>
               <a:t>3/31/2026</a:t>
             </a:fld>
             <a:endParaRPr lang="en-US"/>
@@ -419,7 +1112,7 @@
       </p:sp>
       <p:sp>
         <p:nvSpPr>
-          <p:cNvPr id="5" name="Footer Placeholder 4"/>
+          <p:cNvPr id="638518952" name="Footer Placeholder 4"/>
           <p:cNvSpPr>
             <a:spLocks noGrp="1"/>
           </p:cNvSpPr>
@@ -427,18 +1120,21 @@
             <p:ph type="ftr" sz="quarter" idx="11"/>
           </p:nvPr>
         </p:nvSpPr>
-        <p:spPr/>
-        <p:txBody>
-          <a:bodyPr/>
-          <a:lstStyle/>
-          <a:p>
-            <a:endParaRPr lang="en-US"/>
-          </a:p>
-        </p:txBody>
-      </p:sp>
-      <p:sp>
-        <p:nvSpPr>
-          <p:cNvPr id="6" name="Slide Number Placeholder 5"/>
+        <p:spPr bwMode="auto"/>
+        <p:txBody>
+          <a:bodyPr/>
+          <a:lstStyle/>
+          <a:p>
+            <a:pPr>
+              <a:defRPr/>
+            </a:pPr>
+            <a:endParaRPr lang="en-US"/>
+          </a:p>
+        </p:txBody>
+      </p:sp>
+      <p:sp>
+        <p:nvSpPr>
+          <p:cNvPr id="689639376" name="Slide Number Placeholder 5"/>
           <p:cNvSpPr>
             <a:spLocks noGrp="1"/>
           </p:cNvSpPr>
@@ -446,13 +1142,16 @@
             <p:ph type="sldNum" sz="quarter" idx="12"/>
           </p:nvPr>
         </p:nvSpPr>
-        <p:spPr/>
-        <p:txBody>
-          <a:bodyPr/>
-          <a:lstStyle/>
-          <a:p>
+        <p:spPr bwMode="auto"/>
+        <p:txBody>
+          <a:bodyPr/>
+          <a:lstStyle/>
+          <a:p>
+            <a:pPr>
+              <a:defRPr/>
+            </a:pPr>
             <a:fld id="{F6B844F4-D5BB-4B6C-9919-0766FCF7BAC1}" type="slidenum">
-              <a:rPr lang="en-US" smtClean="0"/>
+              <a:rPr lang="en-US"/>
               <a:t>‹#›</a:t>
             </a:fld>
             <a:endParaRPr lang="en-US"/>
@@ -460,11 +1159,6 @@
         </p:txBody>
       </p:sp>
     </p:spTree>
-    <p:extLst>
-      <p:ext uri="{BB962C8B-B14F-4D97-AF65-F5344CB8AC3E}">
-        <p14:creationId xmlns:p14="http://schemas.microsoft.com/office/powerpoint/2010/main" val="1807877089"/>
-      </p:ext>
-    </p:extLst>
   </p:cSld>
   <p:clrMapOvr>
     <a:masterClrMapping/>
@@ -473,7 +1167,7 @@
 </file>
 
 <file path=ppt/slideLayouts/slideLayout11.xml><?xml version="1.0" encoding="utf-8"?>
-<p:sldLayout xmlns:a="http://schemas.openxmlformats.org/drawingml/2006/main" xmlns:r="http://schemas.openxmlformats.org/officeDocument/2006/relationships" xmlns:p="http://schemas.openxmlformats.org/presentationml/2006/main" type="vertTitleAndTx" preserve="1">
+<p:sldLayout xmlns:a="http://schemas.openxmlformats.org/drawingml/2006/main" xmlns:r="http://schemas.openxmlformats.org/officeDocument/2006/relationships" xmlns:p="http://schemas.openxmlformats.org/presentationml/2006/main" xmlns:m="http://schemas.openxmlformats.org/officeDocument/2006/math" xmlns:w="http://schemas.openxmlformats.org/wordprocessingml/2006/main" matchingName="" preserve="1" showMasterPhAnim="0" showMasterSp="1" type="vertTitleAndTx" userDrawn="1">
   <p:cSld name="Vertical Title and Text">
     <p:spTree>
       <p:nvGrpSpPr>
@@ -481,7 +1175,7 @@
         <p:cNvGrpSpPr/>
         <p:nvPr/>
       </p:nvGrpSpPr>
-      <p:grpSpPr>
+      <p:grpSpPr bwMode="auto">
         <a:xfrm>
           <a:off x="0" y="0"/>
           <a:ext cx="0" cy="0"/>
@@ -491,7 +1185,7 @@
       </p:grpSpPr>
       <p:sp>
         <p:nvSpPr>
-          <p:cNvPr id="2" name="Vertical Title 1"/>
+          <p:cNvPr id="320116441" name="Vertical Title 1"/>
           <p:cNvSpPr>
             <a:spLocks noGrp="1"/>
           </p:cNvSpPr>
@@ -499,7 +1193,7 @@
             <p:ph type="title" orient="vert"/>
           </p:nvPr>
         </p:nvSpPr>
-        <p:spPr>
+        <p:spPr bwMode="auto">
           <a:xfrm>
             <a:off x="8724900" y="365125"/>
             <a:ext cx="2628900" cy="5811838"/>
@@ -509,8 +1203,11 @@
           <a:bodyPr vert="eaVert"/>
           <a:lstStyle/>
           <a:p>
-            <a:r>
-              <a:rPr lang="en-US" smtClean="0"/>
+            <a:pPr>
+              <a:defRPr/>
+            </a:pPr>
+            <a:r>
+              <a:rPr lang="en-US"/>
               <a:t>Click to edit Master title style</a:t>
             </a:r>
             <a:endParaRPr lang="en-US"/>
@@ -519,7 +1216,7 @@
       </p:sp>
       <p:sp>
         <p:nvSpPr>
-          <p:cNvPr id="3" name="Vertical Text Placeholder 2"/>
+          <p:cNvPr id="1188579133" name="Vertical Text Placeholder 2"/>
           <p:cNvSpPr>
             <a:spLocks noGrp="1"/>
           </p:cNvSpPr>
@@ -527,7 +1224,7 @@
             <p:ph type="body" orient="vert" idx="1"/>
           </p:nvPr>
         </p:nvSpPr>
-        <p:spPr>
+        <p:spPr bwMode="auto">
           <a:xfrm>
             <a:off x="838200" y="365125"/>
             <a:ext cx="7734300" cy="5811838"/>
@@ -537,37 +1234,51 @@
           <a:bodyPr vert="eaVert"/>
           <a:lstStyle/>
           <a:p>
-            <a:pPr lvl="0"/>
-            <a:r>
-              <a:rPr lang="en-US" smtClean="0"/>
+            <a:pPr lvl="0">
+              <a:defRPr/>
+            </a:pPr>
+            <a:r>
+              <a:rPr lang="en-US"/>
               <a:t>Edit Master text styles</a:t>
             </a:r>
-          </a:p>
-          <a:p>
-            <a:pPr lvl="1"/>
-            <a:r>
-              <a:rPr lang="en-US" smtClean="0"/>
+            <a:endParaRPr/>
+          </a:p>
+          <a:p>
+            <a:pPr lvl="1">
+              <a:defRPr/>
+            </a:pPr>
+            <a:r>
+              <a:rPr lang="en-US"/>
               <a:t>Second level</a:t>
             </a:r>
-          </a:p>
-          <a:p>
-            <a:pPr lvl="2"/>
-            <a:r>
-              <a:rPr lang="en-US" smtClean="0"/>
+            <a:endParaRPr/>
+          </a:p>
+          <a:p>
+            <a:pPr lvl="2">
+              <a:defRPr/>
+            </a:pPr>
+            <a:r>
+              <a:rPr lang="en-US"/>
               <a:t>Third level</a:t>
             </a:r>
-          </a:p>
-          <a:p>
-            <a:pPr lvl="3"/>
-            <a:r>
-              <a:rPr lang="en-US" smtClean="0"/>
+            <a:endParaRPr/>
+          </a:p>
+          <a:p>
+            <a:pPr lvl="3">
+              <a:defRPr/>
+            </a:pPr>
+            <a:r>
+              <a:rPr lang="en-US"/>
               <a:t>Fourth level</a:t>
             </a:r>
-          </a:p>
-          <a:p>
-            <a:pPr lvl="4"/>
-            <a:r>
-              <a:rPr lang="en-US" smtClean="0"/>
+            <a:endParaRPr/>
+          </a:p>
+          <a:p>
+            <a:pPr lvl="4">
+              <a:defRPr/>
+            </a:pPr>
+            <a:r>
+              <a:rPr lang="en-US"/>
               <a:t>Fifth level</a:t>
             </a:r>
             <a:endParaRPr lang="en-US"/>
@@ -576,7 +1287,7 @@
       </p:sp>
       <p:sp>
         <p:nvSpPr>
-          <p:cNvPr id="4" name="Date Placeholder 3"/>
+          <p:cNvPr id="68382594" name="Date Placeholder 3"/>
           <p:cNvSpPr>
             <a:spLocks noGrp="1"/>
           </p:cNvSpPr>
@@ -584,13 +1295,16 @@
             <p:ph type="dt" sz="half" idx="10"/>
           </p:nvPr>
         </p:nvSpPr>
-        <p:spPr/>
-        <p:txBody>
-          <a:bodyPr/>
-          <a:lstStyle/>
-          <a:p>
+        <p:spPr bwMode="auto"/>
+        <p:txBody>
+          <a:bodyPr/>
+          <a:lstStyle/>
+          <a:p>
+            <a:pPr>
+              <a:defRPr/>
+            </a:pPr>
             <a:fld id="{98CC69C8-8B53-4FDF-AAB7-FE39925D3764}" type="datetimeFigureOut">
-              <a:rPr lang="en-US" smtClean="0"/>
+              <a:rPr lang="en-US"/>
               <a:t>3/31/2026</a:t>
             </a:fld>
             <a:endParaRPr lang="en-US"/>
@@ -599,7 +1313,7 @@
       </p:sp>
       <p:sp>
         <p:nvSpPr>
-          <p:cNvPr id="5" name="Footer Placeholder 4"/>
+          <p:cNvPr id="798057453" name="Footer Placeholder 4"/>
           <p:cNvSpPr>
             <a:spLocks noGrp="1"/>
           </p:cNvSpPr>
@@ -607,18 +1321,21 @@
             <p:ph type="ftr" sz="quarter" idx="11"/>
           </p:nvPr>
         </p:nvSpPr>
-        <p:spPr/>
-        <p:txBody>
-          <a:bodyPr/>
-          <a:lstStyle/>
-          <a:p>
-            <a:endParaRPr lang="en-US"/>
-          </a:p>
-        </p:txBody>
-      </p:sp>
-      <p:sp>
-        <p:nvSpPr>
-          <p:cNvPr id="6" name="Slide Number Placeholder 5"/>
+        <p:spPr bwMode="auto"/>
+        <p:txBody>
+          <a:bodyPr/>
+          <a:lstStyle/>
+          <a:p>
+            <a:pPr>
+              <a:defRPr/>
+            </a:pPr>
+            <a:endParaRPr lang="en-US"/>
+          </a:p>
+        </p:txBody>
+      </p:sp>
+      <p:sp>
+        <p:nvSpPr>
+          <p:cNvPr id="467811473" name="Slide Number Placeholder 5"/>
           <p:cNvSpPr>
             <a:spLocks noGrp="1"/>
           </p:cNvSpPr>
@@ -626,13 +1343,16 @@
             <p:ph type="sldNum" sz="quarter" idx="12"/>
           </p:nvPr>
         </p:nvSpPr>
-        <p:spPr/>
-        <p:txBody>
-          <a:bodyPr/>
-          <a:lstStyle/>
-          <a:p>
+        <p:spPr bwMode="auto"/>
+        <p:txBody>
+          <a:bodyPr/>
+          <a:lstStyle/>
+          <a:p>
+            <a:pPr>
+              <a:defRPr/>
+            </a:pPr>
             <a:fld id="{F6B844F4-D5BB-4B6C-9919-0766FCF7BAC1}" type="slidenum">
-              <a:rPr lang="en-US" smtClean="0"/>
+              <a:rPr lang="en-US"/>
               <a:t>‹#›</a:t>
             </a:fld>
             <a:endParaRPr lang="en-US"/>
@@ -640,11 +1360,6 @@
         </p:txBody>
       </p:sp>
     </p:spTree>
-    <p:extLst>
-      <p:ext uri="{BB962C8B-B14F-4D97-AF65-F5344CB8AC3E}">
-        <p14:creationId xmlns:p14="http://schemas.microsoft.com/office/powerpoint/2010/main" val="3017736483"/>
-      </p:ext>
-    </p:extLst>
   </p:cSld>
   <p:clrMapOvr>
     <a:masterClrMapping/>
@@ -653,7 +1368,7 @@
 </file>
 
 <file path=ppt/slideLayouts/slideLayout2.xml><?xml version="1.0" encoding="utf-8"?>
-<p:sldLayout xmlns:a="http://schemas.openxmlformats.org/drawingml/2006/main" xmlns:r="http://schemas.openxmlformats.org/officeDocument/2006/relationships" xmlns:p="http://schemas.openxmlformats.org/presentationml/2006/main" type="obj" preserve="1">
+<p:sldLayout xmlns:a="http://schemas.openxmlformats.org/drawingml/2006/main" xmlns:r="http://schemas.openxmlformats.org/officeDocument/2006/relationships" xmlns:p="http://schemas.openxmlformats.org/presentationml/2006/main" xmlns:m="http://schemas.openxmlformats.org/officeDocument/2006/math" xmlns:w="http://schemas.openxmlformats.org/wordprocessingml/2006/main" matchingName="" preserve="1" showMasterPhAnim="0" showMasterSp="1" type="obj" userDrawn="1">
   <p:cSld name="Title and Content">
     <p:spTree>
       <p:nvGrpSpPr>
@@ -661,7 +1376,7 @@
         <p:cNvGrpSpPr/>
         <p:nvPr/>
       </p:nvGrpSpPr>
-      <p:grpSpPr>
+      <p:grpSpPr bwMode="auto">
         <a:xfrm>
           <a:off x="0" y="0"/>
           <a:ext cx="0" cy="0"/>
@@ -671,7 +1386,7 @@
       </p:grpSpPr>
       <p:sp>
         <p:nvSpPr>
-          <p:cNvPr id="2" name="Title 1"/>
+          <p:cNvPr id="2063043875" name="Title 1"/>
           <p:cNvSpPr>
             <a:spLocks noGrp="1"/>
           </p:cNvSpPr>
@@ -679,13 +1394,16 @@
             <p:ph type="title"/>
           </p:nvPr>
         </p:nvSpPr>
-        <p:spPr/>
-        <p:txBody>
-          <a:bodyPr/>
-          <a:lstStyle/>
-          <a:p>
-            <a:r>
-              <a:rPr lang="en-US" smtClean="0"/>
+        <p:spPr bwMode="auto"/>
+        <p:txBody>
+          <a:bodyPr/>
+          <a:lstStyle/>
+          <a:p>
+            <a:pPr>
+              <a:defRPr/>
+            </a:pPr>
+            <a:r>
+              <a:rPr lang="en-US"/>
               <a:t>Click to edit Master title style</a:t>
             </a:r>
             <a:endParaRPr lang="en-US"/>
@@ -694,7 +1412,7 @@
       </p:sp>
       <p:sp>
         <p:nvSpPr>
-          <p:cNvPr id="3" name="Content Placeholder 2"/>
+          <p:cNvPr id="1693324980" name="Content Placeholder 2"/>
           <p:cNvSpPr>
             <a:spLocks noGrp="1"/>
           </p:cNvSpPr>
@@ -702,42 +1420,56 @@
             <p:ph idx="1"/>
           </p:nvPr>
         </p:nvSpPr>
-        <p:spPr/>
-        <p:txBody>
-          <a:bodyPr/>
-          <a:lstStyle/>
-          <a:p>
-            <a:pPr lvl="0"/>
-            <a:r>
-              <a:rPr lang="en-US" smtClean="0"/>
+        <p:spPr bwMode="auto"/>
+        <p:txBody>
+          <a:bodyPr/>
+          <a:lstStyle/>
+          <a:p>
+            <a:pPr lvl="0">
+              <a:defRPr/>
+            </a:pPr>
+            <a:r>
+              <a:rPr lang="en-US"/>
               <a:t>Edit Master text styles</a:t>
             </a:r>
-          </a:p>
-          <a:p>
-            <a:pPr lvl="1"/>
-            <a:r>
-              <a:rPr lang="en-US" smtClean="0"/>
+            <a:endParaRPr/>
+          </a:p>
+          <a:p>
+            <a:pPr lvl="1">
+              <a:defRPr/>
+            </a:pPr>
+            <a:r>
+              <a:rPr lang="en-US"/>
               <a:t>Second level</a:t>
             </a:r>
-          </a:p>
-          <a:p>
-            <a:pPr lvl="2"/>
-            <a:r>
-              <a:rPr lang="en-US" smtClean="0"/>
+            <a:endParaRPr/>
+          </a:p>
+          <a:p>
+            <a:pPr lvl="2">
+              <a:defRPr/>
+            </a:pPr>
+            <a:r>
+              <a:rPr lang="en-US"/>
               <a:t>Third level</a:t>
             </a:r>
-          </a:p>
-          <a:p>
-            <a:pPr lvl="3"/>
-            <a:r>
-              <a:rPr lang="en-US" smtClean="0"/>
+            <a:endParaRPr/>
+          </a:p>
+          <a:p>
+            <a:pPr lvl="3">
+              <a:defRPr/>
+            </a:pPr>
+            <a:r>
+              <a:rPr lang="en-US"/>
               <a:t>Fourth level</a:t>
             </a:r>
-          </a:p>
-          <a:p>
-            <a:pPr lvl="4"/>
-            <a:r>
-              <a:rPr lang="en-US" smtClean="0"/>
+            <a:endParaRPr/>
+          </a:p>
+          <a:p>
+            <a:pPr lvl="4">
+              <a:defRPr/>
+            </a:pPr>
+            <a:r>
+              <a:rPr lang="en-US"/>
               <a:t>Fifth level</a:t>
             </a:r>
             <a:endParaRPr lang="en-US"/>
@@ -746,7 +1478,7 @@
       </p:sp>
       <p:sp>
         <p:nvSpPr>
-          <p:cNvPr id="4" name="Date Placeholder 3"/>
+          <p:cNvPr id="340009540" name="Date Placeholder 3"/>
           <p:cNvSpPr>
             <a:spLocks noGrp="1"/>
           </p:cNvSpPr>
@@ -754,13 +1486,16 @@
             <p:ph type="dt" sz="half" idx="10"/>
           </p:nvPr>
         </p:nvSpPr>
-        <p:spPr/>
-        <p:txBody>
-          <a:bodyPr/>
-          <a:lstStyle/>
-          <a:p>
+        <p:spPr bwMode="auto"/>
+        <p:txBody>
+          <a:bodyPr/>
+          <a:lstStyle/>
+          <a:p>
+            <a:pPr>
+              <a:defRPr/>
+            </a:pPr>
             <a:fld id="{98CC69C8-8B53-4FDF-AAB7-FE39925D3764}" type="datetimeFigureOut">
-              <a:rPr lang="en-US" smtClean="0"/>
+              <a:rPr lang="en-US"/>
               <a:t>3/31/2026</a:t>
             </a:fld>
             <a:endParaRPr lang="en-US"/>
@@ -769,7 +1504,7 @@
       </p:sp>
       <p:sp>
         <p:nvSpPr>
-          <p:cNvPr id="5" name="Footer Placeholder 4"/>
+          <p:cNvPr id="85922791" name="Footer Placeholder 4"/>
           <p:cNvSpPr>
             <a:spLocks noGrp="1"/>
           </p:cNvSpPr>
@@ -777,18 +1512,21 @@
             <p:ph type="ftr" sz="quarter" idx="11"/>
           </p:nvPr>
         </p:nvSpPr>
-        <p:spPr/>
-        <p:txBody>
-          <a:bodyPr/>
-          <a:lstStyle/>
-          <a:p>
-            <a:endParaRPr lang="en-US"/>
-          </a:p>
-        </p:txBody>
-      </p:sp>
-      <p:sp>
-        <p:nvSpPr>
-          <p:cNvPr id="6" name="Slide Number Placeholder 5"/>
+        <p:spPr bwMode="auto"/>
+        <p:txBody>
+          <a:bodyPr/>
+          <a:lstStyle/>
+          <a:p>
+            <a:pPr>
+              <a:defRPr/>
+            </a:pPr>
+            <a:endParaRPr lang="en-US"/>
+          </a:p>
+        </p:txBody>
+      </p:sp>
+      <p:sp>
+        <p:nvSpPr>
+          <p:cNvPr id="744765876" name="Slide Number Placeholder 5"/>
           <p:cNvSpPr>
             <a:spLocks noGrp="1"/>
           </p:cNvSpPr>
@@ -796,13 +1534,16 @@
             <p:ph type="sldNum" sz="quarter" idx="12"/>
           </p:nvPr>
         </p:nvSpPr>
-        <p:spPr/>
-        <p:txBody>
-          <a:bodyPr/>
-          <a:lstStyle/>
-          <a:p>
+        <p:spPr bwMode="auto"/>
+        <p:txBody>
+          <a:bodyPr/>
+          <a:lstStyle/>
+          <a:p>
+            <a:pPr>
+              <a:defRPr/>
+            </a:pPr>
             <a:fld id="{F6B844F4-D5BB-4B6C-9919-0766FCF7BAC1}" type="slidenum">
-              <a:rPr lang="en-US" smtClean="0"/>
+              <a:rPr lang="en-US"/>
               <a:t>‹#›</a:t>
             </a:fld>
             <a:endParaRPr lang="en-US"/>
@@ -810,11 +1551,6 @@
         </p:txBody>
       </p:sp>
     </p:spTree>
-    <p:extLst>
-      <p:ext uri="{BB962C8B-B14F-4D97-AF65-F5344CB8AC3E}">
-        <p14:creationId xmlns:p14="http://schemas.microsoft.com/office/powerpoint/2010/main" val="4136936784"/>
-      </p:ext>
-    </p:extLst>
   </p:cSld>
   <p:clrMapOvr>
     <a:masterClrMapping/>
@@ -823,7 +1559,7 @@
 </file>
 
 <file path=ppt/slideLayouts/slideLayout3.xml><?xml version="1.0" encoding="utf-8"?>
-<p:sldLayout xmlns:a="http://schemas.openxmlformats.org/drawingml/2006/main" xmlns:r="http://schemas.openxmlformats.org/officeDocument/2006/relationships" xmlns:p="http://schemas.openxmlformats.org/presentationml/2006/main" type="secHead" preserve="1">
+<p:sldLayout xmlns:a="http://schemas.openxmlformats.org/drawingml/2006/main" xmlns:r="http://schemas.openxmlformats.org/officeDocument/2006/relationships" xmlns:p="http://schemas.openxmlformats.org/presentationml/2006/main" xmlns:m="http://schemas.openxmlformats.org/officeDocument/2006/math" xmlns:w="http://schemas.openxmlformats.org/wordprocessingml/2006/main" matchingName="" preserve="1" showMasterPhAnim="0" showMasterSp="1" type="secHead" userDrawn="1">
   <p:cSld name="Section Header">
     <p:spTree>
       <p:nvGrpSpPr>
@@ -831,7 +1567,7 @@
         <p:cNvGrpSpPr/>
         <p:nvPr/>
       </p:nvGrpSpPr>
-      <p:grpSpPr>
+      <p:grpSpPr bwMode="auto">
         <a:xfrm>
           <a:off x="0" y="0"/>
           <a:ext cx="0" cy="0"/>
@@ -841,7 +1577,7 @@
       </p:grpSpPr>
       <p:sp>
         <p:nvSpPr>
-          <p:cNvPr id="2" name="Title 1"/>
+          <p:cNvPr id="2038425598" name="Title 1"/>
           <p:cNvSpPr>
             <a:spLocks noGrp="1"/>
           </p:cNvSpPr>
@@ -849,7 +1585,7 @@
             <p:ph type="title"/>
           </p:nvPr>
         </p:nvSpPr>
-        <p:spPr>
+        <p:spPr bwMode="auto">
           <a:xfrm>
             <a:off x="831850" y="1709738"/>
             <a:ext cx="10515600" cy="2852737"/>
@@ -863,8 +1599,11 @@
             </a:lvl1pPr>
           </a:lstStyle>
           <a:p>
-            <a:r>
-              <a:rPr lang="en-US" smtClean="0"/>
+            <a:pPr>
+              <a:defRPr/>
+            </a:pPr>
+            <a:r>
+              <a:rPr lang="en-US"/>
               <a:t>Click to edit Master title style</a:t>
             </a:r>
             <a:endParaRPr lang="en-US"/>
@@ -873,7 +1612,7 @@
       </p:sp>
       <p:sp>
         <p:nvSpPr>
-          <p:cNvPr id="3" name="Text Placeholder 2"/>
+          <p:cNvPr id="1911014352" name="Text Placeholder 2"/>
           <p:cNvSpPr>
             <a:spLocks noGrp="1"/>
           </p:cNvSpPr>
@@ -881,7 +1620,7 @@
             <p:ph type="body" idx="1"/>
           </p:nvPr>
         </p:nvSpPr>
-        <p:spPr>
+        <p:spPr bwMode="auto">
           <a:xfrm>
             <a:off x="831850" y="4589463"/>
             <a:ext cx="10515600" cy="1500187"/>
@@ -982,17 +1721,20 @@
             </a:lvl9pPr>
           </a:lstStyle>
           <a:p>
-            <a:pPr lvl="0"/>
-            <a:r>
-              <a:rPr lang="en-US" smtClean="0"/>
+            <a:pPr lvl="0">
+              <a:defRPr/>
+            </a:pPr>
+            <a:r>
+              <a:rPr lang="en-US"/>
               <a:t>Edit Master text styles</a:t>
             </a:r>
-          </a:p>
-        </p:txBody>
-      </p:sp>
-      <p:sp>
-        <p:nvSpPr>
-          <p:cNvPr id="4" name="Date Placeholder 3"/>
+            <a:endParaRPr/>
+          </a:p>
+        </p:txBody>
+      </p:sp>
+      <p:sp>
+        <p:nvSpPr>
+          <p:cNvPr id="568251334" name="Date Placeholder 3"/>
           <p:cNvSpPr>
             <a:spLocks noGrp="1"/>
           </p:cNvSpPr>
@@ -1000,13 +1742,16 @@
             <p:ph type="dt" sz="half" idx="10"/>
           </p:nvPr>
         </p:nvSpPr>
-        <p:spPr/>
-        <p:txBody>
-          <a:bodyPr/>
-          <a:lstStyle/>
-          <a:p>
+        <p:spPr bwMode="auto"/>
+        <p:txBody>
+          <a:bodyPr/>
+          <a:lstStyle/>
+          <a:p>
+            <a:pPr>
+              <a:defRPr/>
+            </a:pPr>
             <a:fld id="{98CC69C8-8B53-4FDF-AAB7-FE39925D3764}" type="datetimeFigureOut">
-              <a:rPr lang="en-US" smtClean="0"/>
+              <a:rPr lang="en-US"/>
               <a:t>3/31/2026</a:t>
             </a:fld>
             <a:endParaRPr lang="en-US"/>
@@ -1015,7 +1760,7 @@
       </p:sp>
       <p:sp>
         <p:nvSpPr>
-          <p:cNvPr id="5" name="Footer Placeholder 4"/>
+          <p:cNvPr id="933388547" name="Footer Placeholder 4"/>
           <p:cNvSpPr>
             <a:spLocks noGrp="1"/>
           </p:cNvSpPr>
@@ -1023,18 +1768,21 @@
             <p:ph type="ftr" sz="quarter" idx="11"/>
           </p:nvPr>
         </p:nvSpPr>
-        <p:spPr/>
-        <p:txBody>
-          <a:bodyPr/>
-          <a:lstStyle/>
-          <a:p>
-            <a:endParaRPr lang="en-US"/>
-          </a:p>
-        </p:txBody>
-      </p:sp>
-      <p:sp>
-        <p:nvSpPr>
-          <p:cNvPr id="6" name="Slide Number Placeholder 5"/>
+        <p:spPr bwMode="auto"/>
+        <p:txBody>
+          <a:bodyPr/>
+          <a:lstStyle/>
+          <a:p>
+            <a:pPr>
+              <a:defRPr/>
+            </a:pPr>
+            <a:endParaRPr lang="en-US"/>
+          </a:p>
+        </p:txBody>
+      </p:sp>
+      <p:sp>
+        <p:nvSpPr>
+          <p:cNvPr id="372682184" name="Slide Number Placeholder 5"/>
           <p:cNvSpPr>
             <a:spLocks noGrp="1"/>
           </p:cNvSpPr>
@@ -1042,13 +1790,16 @@
             <p:ph type="sldNum" sz="quarter" idx="12"/>
           </p:nvPr>
         </p:nvSpPr>
-        <p:spPr/>
-        <p:txBody>
-          <a:bodyPr/>
-          <a:lstStyle/>
-          <a:p>
+        <p:spPr bwMode="auto"/>
+        <p:txBody>
+          <a:bodyPr/>
+          <a:lstStyle/>
+          <a:p>
+            <a:pPr>
+              <a:defRPr/>
+            </a:pPr>
             <a:fld id="{F6B844F4-D5BB-4B6C-9919-0766FCF7BAC1}" type="slidenum">
-              <a:rPr lang="en-US" smtClean="0"/>
+              <a:rPr lang="en-US"/>
               <a:t>‹#›</a:t>
             </a:fld>
             <a:endParaRPr lang="en-US"/>
@@ -1056,11 +1807,6 @@
         </p:txBody>
       </p:sp>
     </p:spTree>
-    <p:extLst>
-      <p:ext uri="{BB962C8B-B14F-4D97-AF65-F5344CB8AC3E}">
-        <p14:creationId xmlns:p14="http://schemas.microsoft.com/office/powerpoint/2010/main" val="2099123670"/>
-      </p:ext>
-    </p:extLst>
   </p:cSld>
   <p:clrMapOvr>
     <a:masterClrMapping/>
@@ -1069,7 +1815,7 @@
 </file>
 
 <file path=ppt/slideLayouts/slideLayout4.xml><?xml version="1.0" encoding="utf-8"?>
-<p:sldLayout xmlns:a="http://schemas.openxmlformats.org/drawingml/2006/main" xmlns:r="http://schemas.openxmlformats.org/officeDocument/2006/relationships" xmlns:p="http://schemas.openxmlformats.org/presentationml/2006/main" type="twoObj" preserve="1">
+<p:sldLayout xmlns:a="http://schemas.openxmlformats.org/drawingml/2006/main" xmlns:r="http://schemas.openxmlformats.org/officeDocument/2006/relationships" xmlns:p="http://schemas.openxmlformats.org/presentationml/2006/main" xmlns:m="http://schemas.openxmlformats.org/officeDocument/2006/math" xmlns:w="http://schemas.openxmlformats.org/wordprocessingml/2006/main" matchingName="" preserve="1" showMasterPhAnim="0" showMasterSp="1" type="twoObj" userDrawn="1">
   <p:cSld name="Two Content">
     <p:spTree>
       <p:nvGrpSpPr>
@@ -1077,7 +1823,7 @@
         <p:cNvGrpSpPr/>
         <p:nvPr/>
       </p:nvGrpSpPr>
-      <p:grpSpPr>
+      <p:grpSpPr bwMode="auto">
         <a:xfrm>
           <a:off x="0" y="0"/>
           <a:ext cx="0" cy="0"/>
@@ -1087,7 +1833,7 @@
       </p:grpSpPr>
       <p:sp>
         <p:nvSpPr>
-          <p:cNvPr id="2" name="Title 1"/>
+          <p:cNvPr id="1749304631" name="Title 1"/>
           <p:cNvSpPr>
             <a:spLocks noGrp="1"/>
           </p:cNvSpPr>
@@ -1095,13 +1841,16 @@
             <p:ph type="title"/>
           </p:nvPr>
         </p:nvSpPr>
-        <p:spPr/>
-        <p:txBody>
-          <a:bodyPr/>
-          <a:lstStyle/>
-          <a:p>
-            <a:r>
-              <a:rPr lang="en-US" smtClean="0"/>
+        <p:spPr bwMode="auto"/>
+        <p:txBody>
+          <a:bodyPr/>
+          <a:lstStyle/>
+          <a:p>
+            <a:pPr>
+              <a:defRPr/>
+            </a:pPr>
+            <a:r>
+              <a:rPr lang="en-US"/>
               <a:t>Click to edit Master title style</a:t>
             </a:r>
             <a:endParaRPr lang="en-US"/>
@@ -1110,7 +1859,7 @@
       </p:sp>
       <p:sp>
         <p:nvSpPr>
-          <p:cNvPr id="3" name="Content Placeholder 2"/>
+          <p:cNvPr id="419713889" name="Content Placeholder 2"/>
           <p:cNvSpPr>
             <a:spLocks noGrp="1"/>
           </p:cNvSpPr>
@@ -1118,7 +1867,7 @@
             <p:ph sz="half" idx="1"/>
           </p:nvPr>
         </p:nvSpPr>
-        <p:spPr>
+        <p:spPr bwMode="auto">
           <a:xfrm>
             <a:off x="838200" y="1825625"/>
             <a:ext cx="5181600" cy="4351338"/>
@@ -1128,37 +1877,51 @@
           <a:bodyPr/>
           <a:lstStyle/>
           <a:p>
-            <a:pPr lvl="0"/>
-            <a:r>
-              <a:rPr lang="en-US" smtClean="0"/>
+            <a:pPr lvl="0">
+              <a:defRPr/>
+            </a:pPr>
+            <a:r>
+              <a:rPr lang="en-US"/>
               <a:t>Edit Master text styles</a:t>
             </a:r>
-          </a:p>
-          <a:p>
-            <a:pPr lvl="1"/>
-            <a:r>
-              <a:rPr lang="en-US" smtClean="0"/>
+            <a:endParaRPr/>
+          </a:p>
+          <a:p>
+            <a:pPr lvl="1">
+              <a:defRPr/>
+            </a:pPr>
+            <a:r>
+              <a:rPr lang="en-US"/>
               <a:t>Second level</a:t>
             </a:r>
-          </a:p>
-          <a:p>
-            <a:pPr lvl="2"/>
-            <a:r>
-              <a:rPr lang="en-US" smtClean="0"/>
+            <a:endParaRPr/>
+          </a:p>
+          <a:p>
+            <a:pPr lvl="2">
+              <a:defRPr/>
+            </a:pPr>
+            <a:r>
+              <a:rPr lang="en-US"/>
               <a:t>Third level</a:t>
             </a:r>
-          </a:p>
-          <a:p>
-            <a:pPr lvl="3"/>
-            <a:r>
-              <a:rPr lang="en-US" smtClean="0"/>
+            <a:endParaRPr/>
+          </a:p>
+          <a:p>
+            <a:pPr lvl="3">
+              <a:defRPr/>
+            </a:pPr>
+            <a:r>
+              <a:rPr lang="en-US"/>
               <a:t>Fourth level</a:t>
             </a:r>
-          </a:p>
-          <a:p>
-            <a:pPr lvl="4"/>
-            <a:r>
-              <a:rPr lang="en-US" smtClean="0"/>
+            <a:endParaRPr/>
+          </a:p>
+          <a:p>
+            <a:pPr lvl="4">
+              <a:defRPr/>
+            </a:pPr>
+            <a:r>
+              <a:rPr lang="en-US"/>
               <a:t>Fifth level</a:t>
             </a:r>
             <a:endParaRPr lang="en-US"/>
@@ -1167,7 +1930,7 @@
       </p:sp>
       <p:sp>
         <p:nvSpPr>
-          <p:cNvPr id="4" name="Content Placeholder 3"/>
+          <p:cNvPr id="265017597" name="Content Placeholder 3"/>
           <p:cNvSpPr>
             <a:spLocks noGrp="1"/>
           </p:cNvSpPr>
@@ -1175,7 +1938,7 @@
             <p:ph sz="half" idx="2"/>
           </p:nvPr>
         </p:nvSpPr>
-        <p:spPr>
+        <p:spPr bwMode="auto">
           <a:xfrm>
             <a:off x="6172200" y="1825625"/>
             <a:ext cx="5181600" cy="4351338"/>
@@ -1185,37 +1948,51 @@
           <a:bodyPr/>
           <a:lstStyle/>
           <a:p>
-            <a:pPr lvl="0"/>
-            <a:r>
-              <a:rPr lang="en-US" smtClean="0"/>
+            <a:pPr lvl="0">
+              <a:defRPr/>
+            </a:pPr>
+            <a:r>
+              <a:rPr lang="en-US"/>
               <a:t>Edit Master text styles</a:t>
             </a:r>
-          </a:p>
-          <a:p>
-            <a:pPr lvl="1"/>
-            <a:r>
-              <a:rPr lang="en-US" smtClean="0"/>
+            <a:endParaRPr/>
+          </a:p>
+          <a:p>
+            <a:pPr lvl="1">
+              <a:defRPr/>
+            </a:pPr>
+            <a:r>
+              <a:rPr lang="en-US"/>
               <a:t>Second level</a:t>
             </a:r>
-          </a:p>
-          <a:p>
-            <a:pPr lvl="2"/>
-            <a:r>
-              <a:rPr lang="en-US" smtClean="0"/>
+            <a:endParaRPr/>
+          </a:p>
+          <a:p>
+            <a:pPr lvl="2">
+              <a:defRPr/>
+            </a:pPr>
+            <a:r>
+              <a:rPr lang="en-US"/>
               <a:t>Third level</a:t>
             </a:r>
-          </a:p>
-          <a:p>
-            <a:pPr lvl="3"/>
-            <a:r>
-              <a:rPr lang="en-US" smtClean="0"/>
+            <a:endParaRPr/>
+          </a:p>
+          <a:p>
+            <a:pPr lvl="3">
+              <a:defRPr/>
+            </a:pPr>
+            <a:r>
+              <a:rPr lang="en-US"/>
               <a:t>Fourth level</a:t>
             </a:r>
-          </a:p>
-          <a:p>
-            <a:pPr lvl="4"/>
-            <a:r>
-              <a:rPr lang="en-US" smtClean="0"/>
+            <a:endParaRPr/>
+          </a:p>
+          <a:p>
+            <a:pPr lvl="4">
+              <a:defRPr/>
+            </a:pPr>
+            <a:r>
+              <a:rPr lang="en-US"/>
               <a:t>Fifth level</a:t>
             </a:r>
             <a:endParaRPr lang="en-US"/>
@@ -1224,7 +2001,7 @@
       </p:sp>
       <p:sp>
         <p:nvSpPr>
-          <p:cNvPr id="5" name="Date Placeholder 4"/>
+          <p:cNvPr id="1466818157" name="Date Placeholder 4"/>
           <p:cNvSpPr>
             <a:spLocks noGrp="1"/>
           </p:cNvSpPr>
@@ -1232,13 +2009,16 @@
             <p:ph type="dt" sz="half" idx="10"/>
           </p:nvPr>
         </p:nvSpPr>
-        <p:spPr/>
-        <p:txBody>
-          <a:bodyPr/>
-          <a:lstStyle/>
-          <a:p>
+        <p:spPr bwMode="auto"/>
+        <p:txBody>
+          <a:bodyPr/>
+          <a:lstStyle/>
+          <a:p>
+            <a:pPr>
+              <a:defRPr/>
+            </a:pPr>
             <a:fld id="{98CC69C8-8B53-4FDF-AAB7-FE39925D3764}" type="datetimeFigureOut">
-              <a:rPr lang="en-US" smtClean="0"/>
+              <a:rPr lang="en-US"/>
               <a:t>3/31/2026</a:t>
             </a:fld>
             <a:endParaRPr lang="en-US"/>
@@ -1247,7 +2027,7 @@
       </p:sp>
       <p:sp>
         <p:nvSpPr>
-          <p:cNvPr id="6" name="Footer Placeholder 5"/>
+          <p:cNvPr id="46532804" name="Footer Placeholder 5"/>
           <p:cNvSpPr>
             <a:spLocks noGrp="1"/>
           </p:cNvSpPr>
@@ -1255,18 +2035,21 @@
             <p:ph type="ftr" sz="quarter" idx="11"/>
           </p:nvPr>
         </p:nvSpPr>
-        <p:spPr/>
-        <p:txBody>
-          <a:bodyPr/>
-          <a:lstStyle/>
-          <a:p>
-            <a:endParaRPr lang="en-US"/>
-          </a:p>
-        </p:txBody>
-      </p:sp>
-      <p:sp>
-        <p:nvSpPr>
-          <p:cNvPr id="7" name="Slide Number Placeholder 6"/>
+        <p:spPr bwMode="auto"/>
+        <p:txBody>
+          <a:bodyPr/>
+          <a:lstStyle/>
+          <a:p>
+            <a:pPr>
+              <a:defRPr/>
+            </a:pPr>
+            <a:endParaRPr lang="en-US"/>
+          </a:p>
+        </p:txBody>
+      </p:sp>
+      <p:sp>
+        <p:nvSpPr>
+          <p:cNvPr id="1946334774" name="Slide Number Placeholder 6"/>
           <p:cNvSpPr>
             <a:spLocks noGrp="1"/>
           </p:cNvSpPr>
@@ -1274,13 +2057,16 @@
             <p:ph type="sldNum" sz="quarter" idx="12"/>
           </p:nvPr>
         </p:nvSpPr>
-        <p:spPr/>
-        <p:txBody>
-          <a:bodyPr/>
-          <a:lstStyle/>
-          <a:p>
+        <p:spPr bwMode="auto"/>
+        <p:txBody>
+          <a:bodyPr/>
+          <a:lstStyle/>
+          <a:p>
+            <a:pPr>
+              <a:defRPr/>
+            </a:pPr>
             <a:fld id="{F6B844F4-D5BB-4B6C-9919-0766FCF7BAC1}" type="slidenum">
-              <a:rPr lang="en-US" smtClean="0"/>
+              <a:rPr lang="en-US"/>
               <a:t>‹#›</a:t>
             </a:fld>
             <a:endParaRPr lang="en-US"/>
@@ -1288,11 +2074,6 @@
         </p:txBody>
       </p:sp>
     </p:spTree>
-    <p:extLst>
-      <p:ext uri="{BB962C8B-B14F-4D97-AF65-F5344CB8AC3E}">
-        <p14:creationId xmlns:p14="http://schemas.microsoft.com/office/powerpoint/2010/main" val="4285840465"/>
-      </p:ext>
-    </p:extLst>
   </p:cSld>
   <p:clrMapOvr>
     <a:masterClrMapping/>
@@ -1301,7 +2082,7 @@
 </file>
 
 <file path=ppt/slideLayouts/slideLayout5.xml><?xml version="1.0" encoding="utf-8"?>
-<p:sldLayout xmlns:a="http://schemas.openxmlformats.org/drawingml/2006/main" xmlns:r="http://schemas.openxmlformats.org/officeDocument/2006/relationships" xmlns:p="http://schemas.openxmlformats.org/presentationml/2006/main" type="twoTxTwoObj" preserve="1">
+<p:sldLayout xmlns:a="http://schemas.openxmlformats.org/drawingml/2006/main" xmlns:r="http://schemas.openxmlformats.org/officeDocument/2006/relationships" xmlns:p="http://schemas.openxmlformats.org/presentationml/2006/main" xmlns:m="http://schemas.openxmlformats.org/officeDocument/2006/math" xmlns:w="http://schemas.openxmlformats.org/wordprocessingml/2006/main" matchingName="" preserve="1" showMasterPhAnim="0" showMasterSp="1" type="twoTxTwoObj" userDrawn="1">
   <p:cSld name="Comparison">
     <p:spTree>
       <p:nvGrpSpPr>
@@ -1309,7 +2090,7 @@
         <p:cNvGrpSpPr/>
         <p:nvPr/>
       </p:nvGrpSpPr>
-      <p:grpSpPr>
+      <p:grpSpPr bwMode="auto">
         <a:xfrm>
           <a:off x="0" y="0"/>
           <a:ext cx="0" cy="0"/>
@@ -1319,7 +2100,7 @@
       </p:grpSpPr>
       <p:sp>
         <p:nvSpPr>
-          <p:cNvPr id="2" name="Title 1"/>
+          <p:cNvPr id="182129648" name="Title 1"/>
           <p:cNvSpPr>
             <a:spLocks noGrp="1"/>
           </p:cNvSpPr>
@@ -1327,7 +2108,7 @@
             <p:ph type="title"/>
           </p:nvPr>
         </p:nvSpPr>
-        <p:spPr>
+        <p:spPr bwMode="auto">
           <a:xfrm>
             <a:off x="839788" y="365125"/>
             <a:ext cx="10515600" cy="1325563"/>
@@ -1337,8 +2118,11 @@
           <a:bodyPr/>
           <a:lstStyle/>
           <a:p>
-            <a:r>
-              <a:rPr lang="en-US" smtClean="0"/>
+            <a:pPr>
+              <a:defRPr/>
+            </a:pPr>
+            <a:r>
+              <a:rPr lang="en-US"/>
               <a:t>Click to edit Master title style</a:t>
             </a:r>
             <a:endParaRPr lang="en-US"/>
@@ -1347,7 +2131,7 @@
       </p:sp>
       <p:sp>
         <p:nvSpPr>
-          <p:cNvPr id="3" name="Text Placeholder 2"/>
+          <p:cNvPr id="1558760141" name="Text Placeholder 2"/>
           <p:cNvSpPr>
             <a:spLocks noGrp="1"/>
           </p:cNvSpPr>
@@ -1355,7 +2139,7 @@
             <p:ph type="body" idx="1"/>
           </p:nvPr>
         </p:nvSpPr>
-        <p:spPr>
+        <p:spPr bwMode="auto">
           <a:xfrm>
             <a:off x="839788" y="1681163"/>
             <a:ext cx="5157787" cy="823912"/>
@@ -1402,17 +2186,20 @@
             </a:lvl9pPr>
           </a:lstStyle>
           <a:p>
-            <a:pPr lvl="0"/>
-            <a:r>
-              <a:rPr lang="en-US" smtClean="0"/>
+            <a:pPr lvl="0">
+              <a:defRPr/>
+            </a:pPr>
+            <a:r>
+              <a:rPr lang="en-US"/>
               <a:t>Edit Master text styles</a:t>
             </a:r>
-          </a:p>
-        </p:txBody>
-      </p:sp>
-      <p:sp>
-        <p:nvSpPr>
-          <p:cNvPr id="4" name="Content Placeholder 3"/>
+            <a:endParaRPr/>
+          </a:p>
+        </p:txBody>
+      </p:sp>
+      <p:sp>
+        <p:nvSpPr>
+          <p:cNvPr id="78313943" name="Content Placeholder 3"/>
           <p:cNvSpPr>
             <a:spLocks noGrp="1"/>
           </p:cNvSpPr>
@@ -1420,9 +2207,9 @@
             <p:ph sz="half" idx="2"/>
           </p:nvPr>
         </p:nvSpPr>
-        <p:spPr>
+        <p:spPr bwMode="auto">
           <a:xfrm>
-            <a:off x="839788" y="2505075"/>
+            <a:off x="839788" y="2505074"/>
             <a:ext cx="5157787" cy="3684588"/>
           </a:xfrm>
         </p:spPr>
@@ -1430,37 +2217,51 @@
           <a:bodyPr/>
           <a:lstStyle/>
           <a:p>
-            <a:pPr lvl="0"/>
-            <a:r>
-              <a:rPr lang="en-US" smtClean="0"/>
+            <a:pPr lvl="0">
+              <a:defRPr/>
+            </a:pPr>
+            <a:r>
+              <a:rPr lang="en-US"/>
               <a:t>Edit Master text styles</a:t>
             </a:r>
-          </a:p>
-          <a:p>
-            <a:pPr lvl="1"/>
-            <a:r>
-              <a:rPr lang="en-US" smtClean="0"/>
+            <a:endParaRPr/>
+          </a:p>
+          <a:p>
+            <a:pPr lvl="1">
+              <a:defRPr/>
+            </a:pPr>
+            <a:r>
+              <a:rPr lang="en-US"/>
               <a:t>Second level</a:t>
             </a:r>
-          </a:p>
-          <a:p>
-            <a:pPr lvl="2"/>
-            <a:r>
-              <a:rPr lang="en-US" smtClean="0"/>
+            <a:endParaRPr/>
+          </a:p>
+          <a:p>
+            <a:pPr lvl="2">
+              <a:defRPr/>
+            </a:pPr>
+            <a:r>
+              <a:rPr lang="en-US"/>
               <a:t>Third level</a:t>
             </a:r>
-          </a:p>
-          <a:p>
-            <a:pPr lvl="3"/>
-            <a:r>
-              <a:rPr lang="en-US" smtClean="0"/>
+            <a:endParaRPr/>
+          </a:p>
+          <a:p>
+            <a:pPr lvl="3">
+              <a:defRPr/>
+            </a:pPr>
+            <a:r>
+              <a:rPr lang="en-US"/>
               <a:t>Fourth level</a:t>
             </a:r>
-          </a:p>
-          <a:p>
-            <a:pPr lvl="4"/>
-            <a:r>
-              <a:rPr lang="en-US" smtClean="0"/>
+            <a:endParaRPr/>
+          </a:p>
+          <a:p>
+            <a:pPr lvl="4">
+              <a:defRPr/>
+            </a:pPr>
+            <a:r>
+              <a:rPr lang="en-US"/>
               <a:t>Fifth level</a:t>
             </a:r>
             <a:endParaRPr lang="en-US"/>
@@ -1469,7 +2270,7 @@
       </p:sp>
       <p:sp>
         <p:nvSpPr>
-          <p:cNvPr id="5" name="Text Placeholder 4"/>
+          <p:cNvPr id="2102908174" name="Text Placeholder 4"/>
           <p:cNvSpPr>
             <a:spLocks noGrp="1"/>
           </p:cNvSpPr>
@@ -1477,7 +2278,7 @@
             <p:ph type="body" sz="quarter" idx="3"/>
           </p:nvPr>
         </p:nvSpPr>
-        <p:spPr>
+        <p:spPr bwMode="auto">
           <a:xfrm>
             <a:off x="6172200" y="1681163"/>
             <a:ext cx="5183188" cy="823912"/>
@@ -1524,17 +2325,20 @@
             </a:lvl9pPr>
           </a:lstStyle>
           <a:p>
-            <a:pPr lvl="0"/>
-            <a:r>
-              <a:rPr lang="en-US" smtClean="0"/>
+            <a:pPr lvl="0">
+              <a:defRPr/>
+            </a:pPr>
+            <a:r>
+              <a:rPr lang="en-US"/>
               <a:t>Edit Master text styles</a:t>
             </a:r>
-          </a:p>
-        </p:txBody>
-      </p:sp>
-      <p:sp>
-        <p:nvSpPr>
-          <p:cNvPr id="6" name="Content Placeholder 5"/>
+            <a:endParaRPr/>
+          </a:p>
+        </p:txBody>
+      </p:sp>
+      <p:sp>
+        <p:nvSpPr>
+          <p:cNvPr id="850007551" name="Content Placeholder 5"/>
           <p:cNvSpPr>
             <a:spLocks noGrp="1"/>
           </p:cNvSpPr>
@@ -1542,9 +2346,9 @@
             <p:ph sz="quarter" idx="4"/>
           </p:nvPr>
         </p:nvSpPr>
-        <p:spPr>
+        <p:spPr bwMode="auto">
           <a:xfrm>
-            <a:off x="6172200" y="2505075"/>
+            <a:off x="6172200" y="2505074"/>
             <a:ext cx="5183188" cy="3684588"/>
           </a:xfrm>
         </p:spPr>
@@ -1552,37 +2356,51 @@
           <a:bodyPr/>
           <a:lstStyle/>
           <a:p>
-            <a:pPr lvl="0"/>
-            <a:r>
-              <a:rPr lang="en-US" smtClean="0"/>
+            <a:pPr lvl="0">
+              <a:defRPr/>
+            </a:pPr>
+            <a:r>
+              <a:rPr lang="en-US"/>
               <a:t>Edit Master text styles</a:t>
             </a:r>
-          </a:p>
-          <a:p>
-            <a:pPr lvl="1"/>
-            <a:r>
-              <a:rPr lang="en-US" smtClean="0"/>
+            <a:endParaRPr/>
+          </a:p>
+          <a:p>
+            <a:pPr lvl="1">
+              <a:defRPr/>
+            </a:pPr>
+            <a:r>
+              <a:rPr lang="en-US"/>
               <a:t>Second level</a:t>
             </a:r>
-          </a:p>
-          <a:p>
-            <a:pPr lvl="2"/>
-            <a:r>
-              <a:rPr lang="en-US" smtClean="0"/>
+            <a:endParaRPr/>
+          </a:p>
+          <a:p>
+            <a:pPr lvl="2">
+              <a:defRPr/>
+            </a:pPr>
+            <a:r>
+              <a:rPr lang="en-US"/>
               <a:t>Third level</a:t>
             </a:r>
-          </a:p>
-          <a:p>
-            <a:pPr lvl="3"/>
-            <a:r>
-              <a:rPr lang="en-US" smtClean="0"/>
+            <a:endParaRPr/>
+          </a:p>
+          <a:p>
+            <a:pPr lvl="3">
+              <a:defRPr/>
+            </a:pPr>
+            <a:r>
+              <a:rPr lang="en-US"/>
               <a:t>Fourth level</a:t>
             </a:r>
-          </a:p>
-          <a:p>
-            <a:pPr lvl="4"/>
-            <a:r>
-              <a:rPr lang="en-US" smtClean="0"/>
+            <a:endParaRPr/>
+          </a:p>
+          <a:p>
+            <a:pPr lvl="4">
+              <a:defRPr/>
+            </a:pPr>
+            <a:r>
+              <a:rPr lang="en-US"/>
               <a:t>Fifth level</a:t>
             </a:r>
             <a:endParaRPr lang="en-US"/>
@@ -1591,7 +2409,7 @@
       </p:sp>
       <p:sp>
         <p:nvSpPr>
-          <p:cNvPr id="7" name="Date Placeholder 6"/>
+          <p:cNvPr id="926416333" name="Date Placeholder 6"/>
           <p:cNvSpPr>
             <a:spLocks noGrp="1"/>
           </p:cNvSpPr>
@@ -1599,13 +2417,16 @@
             <p:ph type="dt" sz="half" idx="10"/>
           </p:nvPr>
         </p:nvSpPr>
-        <p:spPr/>
-        <p:txBody>
-          <a:bodyPr/>
-          <a:lstStyle/>
-          <a:p>
+        <p:spPr bwMode="auto"/>
+        <p:txBody>
+          <a:bodyPr/>
+          <a:lstStyle/>
+          <a:p>
+            <a:pPr>
+              <a:defRPr/>
+            </a:pPr>
             <a:fld id="{98CC69C8-8B53-4FDF-AAB7-FE39925D3764}" type="datetimeFigureOut">
-              <a:rPr lang="en-US" smtClean="0"/>
+              <a:rPr lang="en-US"/>
               <a:t>3/31/2026</a:t>
             </a:fld>
             <a:endParaRPr lang="en-US"/>
@@ -1614,7 +2435,7 @@
       </p:sp>
       <p:sp>
         <p:nvSpPr>
-          <p:cNvPr id="8" name="Footer Placeholder 7"/>
+          <p:cNvPr id="1857407249" name="Footer Placeholder 7"/>
           <p:cNvSpPr>
             <a:spLocks noGrp="1"/>
           </p:cNvSpPr>
@@ -1622,18 +2443,21 @@
             <p:ph type="ftr" sz="quarter" idx="11"/>
           </p:nvPr>
         </p:nvSpPr>
-        <p:spPr/>
-        <p:txBody>
-          <a:bodyPr/>
-          <a:lstStyle/>
-          <a:p>
-            <a:endParaRPr lang="en-US"/>
-          </a:p>
-        </p:txBody>
-      </p:sp>
-      <p:sp>
-        <p:nvSpPr>
-          <p:cNvPr id="9" name="Slide Number Placeholder 8"/>
+        <p:spPr bwMode="auto"/>
+        <p:txBody>
+          <a:bodyPr/>
+          <a:lstStyle/>
+          <a:p>
+            <a:pPr>
+              <a:defRPr/>
+            </a:pPr>
+            <a:endParaRPr lang="en-US"/>
+          </a:p>
+        </p:txBody>
+      </p:sp>
+      <p:sp>
+        <p:nvSpPr>
+          <p:cNvPr id="1424292631" name="Slide Number Placeholder 8"/>
           <p:cNvSpPr>
             <a:spLocks noGrp="1"/>
           </p:cNvSpPr>
@@ -1641,13 +2465,16 @@
             <p:ph type="sldNum" sz="quarter" idx="12"/>
           </p:nvPr>
         </p:nvSpPr>
-        <p:spPr/>
-        <p:txBody>
-          <a:bodyPr/>
-          <a:lstStyle/>
-          <a:p>
+        <p:spPr bwMode="auto"/>
+        <p:txBody>
+          <a:bodyPr/>
+          <a:lstStyle/>
+          <a:p>
+            <a:pPr>
+              <a:defRPr/>
+            </a:pPr>
             <a:fld id="{F6B844F4-D5BB-4B6C-9919-0766FCF7BAC1}" type="slidenum">
-              <a:rPr lang="en-US" smtClean="0"/>
+              <a:rPr lang="en-US"/>
               <a:t>‹#›</a:t>
             </a:fld>
             <a:endParaRPr lang="en-US"/>
@@ -1655,11 +2482,6 @@
         </p:txBody>
       </p:sp>
     </p:spTree>
-    <p:extLst>
-      <p:ext uri="{BB962C8B-B14F-4D97-AF65-F5344CB8AC3E}">
-        <p14:creationId xmlns:p14="http://schemas.microsoft.com/office/powerpoint/2010/main" val="3099580811"/>
-      </p:ext>
-    </p:extLst>
   </p:cSld>
   <p:clrMapOvr>
     <a:masterClrMapping/>
@@ -1668,7 +2490,7 @@
 </file>
 
 <file path=ppt/slideLayouts/slideLayout6.xml><?xml version="1.0" encoding="utf-8"?>
-<p:sldLayout xmlns:a="http://schemas.openxmlformats.org/drawingml/2006/main" xmlns:r="http://schemas.openxmlformats.org/officeDocument/2006/relationships" xmlns:p="http://schemas.openxmlformats.org/presentationml/2006/main" type="titleOnly" preserve="1">
+<p:sldLayout xmlns:a="http://schemas.openxmlformats.org/drawingml/2006/main" xmlns:r="http://schemas.openxmlformats.org/officeDocument/2006/relationships" xmlns:p="http://schemas.openxmlformats.org/presentationml/2006/main" xmlns:m="http://schemas.openxmlformats.org/officeDocument/2006/math" xmlns:w="http://schemas.openxmlformats.org/wordprocessingml/2006/main" matchingName="" preserve="1" showMasterPhAnim="0" showMasterSp="1" type="titleOnly" userDrawn="1">
   <p:cSld name="Title Only">
     <p:spTree>
       <p:nvGrpSpPr>
@@ -1676,7 +2498,7 @@
         <p:cNvGrpSpPr/>
         <p:nvPr/>
       </p:nvGrpSpPr>
-      <p:grpSpPr>
+      <p:grpSpPr bwMode="auto">
         <a:xfrm>
           <a:off x="0" y="0"/>
           <a:ext cx="0" cy="0"/>
@@ -1686,7 +2508,7 @@
       </p:grpSpPr>
       <p:sp>
         <p:nvSpPr>
-          <p:cNvPr id="2" name="Title 1"/>
+          <p:cNvPr id="258196187" name="Title 1"/>
           <p:cNvSpPr>
             <a:spLocks noGrp="1"/>
           </p:cNvSpPr>
@@ -1694,13 +2516,16 @@
             <p:ph type="title"/>
           </p:nvPr>
         </p:nvSpPr>
-        <p:spPr/>
-        <p:txBody>
-          <a:bodyPr/>
-          <a:lstStyle/>
-          <a:p>
-            <a:r>
-              <a:rPr lang="en-US" smtClean="0"/>
+        <p:spPr bwMode="auto"/>
+        <p:txBody>
+          <a:bodyPr/>
+          <a:lstStyle/>
+          <a:p>
+            <a:pPr>
+              <a:defRPr/>
+            </a:pPr>
+            <a:r>
+              <a:rPr lang="en-US"/>
               <a:t>Click to edit Master title style</a:t>
             </a:r>
             <a:endParaRPr lang="en-US"/>
@@ -1709,7 +2534,7 @@
       </p:sp>
       <p:sp>
         <p:nvSpPr>
-          <p:cNvPr id="3" name="Date Placeholder 2"/>
+          <p:cNvPr id="468163332" name="Date Placeholder 2"/>
           <p:cNvSpPr>
             <a:spLocks noGrp="1"/>
           </p:cNvSpPr>
@@ -1717,13 +2542,16 @@
             <p:ph type="dt" sz="half" idx="10"/>
           </p:nvPr>
         </p:nvSpPr>
-        <p:spPr/>
-        <p:txBody>
-          <a:bodyPr/>
-          <a:lstStyle/>
-          <a:p>
+        <p:spPr bwMode="auto"/>
+        <p:txBody>
+          <a:bodyPr/>
+          <a:lstStyle/>
+          <a:p>
+            <a:pPr>
+              <a:defRPr/>
+            </a:pPr>
             <a:fld id="{98CC69C8-8B53-4FDF-AAB7-FE39925D3764}" type="datetimeFigureOut">
-              <a:rPr lang="en-US" smtClean="0"/>
+              <a:rPr lang="en-US"/>
               <a:t>3/31/2026</a:t>
             </a:fld>
             <a:endParaRPr lang="en-US"/>
@@ -1732,7 +2560,7 @@
       </p:sp>
       <p:sp>
         <p:nvSpPr>
-          <p:cNvPr id="4" name="Footer Placeholder 3"/>
+          <p:cNvPr id="588248963" name="Footer Placeholder 3"/>
           <p:cNvSpPr>
             <a:spLocks noGrp="1"/>
           </p:cNvSpPr>
@@ -1740,18 +2568,21 @@
             <p:ph type="ftr" sz="quarter" idx="11"/>
           </p:nvPr>
         </p:nvSpPr>
-        <p:spPr/>
-        <p:txBody>
-          <a:bodyPr/>
-          <a:lstStyle/>
-          <a:p>
-            <a:endParaRPr lang="en-US"/>
-          </a:p>
-        </p:txBody>
-      </p:sp>
-      <p:sp>
-        <p:nvSpPr>
-          <p:cNvPr id="5" name="Slide Number Placeholder 4"/>
+        <p:spPr bwMode="auto"/>
+        <p:txBody>
+          <a:bodyPr/>
+          <a:lstStyle/>
+          <a:p>
+            <a:pPr>
+              <a:defRPr/>
+            </a:pPr>
+            <a:endParaRPr lang="en-US"/>
+          </a:p>
+        </p:txBody>
+      </p:sp>
+      <p:sp>
+        <p:nvSpPr>
+          <p:cNvPr id="1371659095" name="Slide Number Placeholder 4"/>
           <p:cNvSpPr>
             <a:spLocks noGrp="1"/>
           </p:cNvSpPr>
@@ -1759,13 +2590,16 @@
             <p:ph type="sldNum" sz="quarter" idx="12"/>
           </p:nvPr>
         </p:nvSpPr>
-        <p:spPr/>
-        <p:txBody>
-          <a:bodyPr/>
-          <a:lstStyle/>
-          <a:p>
+        <p:spPr bwMode="auto"/>
+        <p:txBody>
+          <a:bodyPr/>
+          <a:lstStyle/>
+          <a:p>
+            <a:pPr>
+              <a:defRPr/>
+            </a:pPr>
             <a:fld id="{F6B844F4-D5BB-4B6C-9919-0766FCF7BAC1}" type="slidenum">
-              <a:rPr lang="en-US" smtClean="0"/>
+              <a:rPr lang="en-US"/>
               <a:t>‹#›</a:t>
             </a:fld>
             <a:endParaRPr lang="en-US"/>
@@ -1773,11 +2607,6 @@
         </p:txBody>
       </p:sp>
     </p:spTree>
-    <p:extLst>
-      <p:ext uri="{BB962C8B-B14F-4D97-AF65-F5344CB8AC3E}">
-        <p14:creationId xmlns:p14="http://schemas.microsoft.com/office/powerpoint/2010/main" val="3382644140"/>
-      </p:ext>
-    </p:extLst>
   </p:cSld>
   <p:clrMapOvr>
     <a:masterClrMapping/>
@@ -1786,7 +2615,7 @@
 </file>
 
 <file path=ppt/slideLayouts/slideLayout7.xml><?xml version="1.0" encoding="utf-8"?>
-<p:sldLayout xmlns:a="http://schemas.openxmlformats.org/drawingml/2006/main" xmlns:r="http://schemas.openxmlformats.org/officeDocument/2006/relationships" xmlns:p="http://schemas.openxmlformats.org/presentationml/2006/main" type="blank" preserve="1">
+<p:sldLayout xmlns:a="http://schemas.openxmlformats.org/drawingml/2006/main" xmlns:r="http://schemas.openxmlformats.org/officeDocument/2006/relationships" xmlns:p="http://schemas.openxmlformats.org/presentationml/2006/main" xmlns:m="http://schemas.openxmlformats.org/officeDocument/2006/math" xmlns:w="http://schemas.openxmlformats.org/wordprocessingml/2006/main" matchingName="" preserve="1" showMasterPhAnim="0" showMasterSp="1" type="blank" userDrawn="1">
   <p:cSld name="Blank">
     <p:spTree>
       <p:nvGrpSpPr>
@@ -1794,7 +2623,7 @@
         <p:cNvGrpSpPr/>
         <p:nvPr/>
       </p:nvGrpSpPr>
-      <p:grpSpPr>
+      <p:grpSpPr bwMode="auto">
         <a:xfrm>
           <a:off x="0" y="0"/>
           <a:ext cx="0" cy="0"/>
@@ -1804,7 +2633,7 @@
       </p:grpSpPr>
       <p:sp>
         <p:nvSpPr>
-          <p:cNvPr id="2" name="Date Placeholder 1"/>
+          <p:cNvPr id="1460312365" name="Date Placeholder 1"/>
           <p:cNvSpPr>
             <a:spLocks noGrp="1"/>
           </p:cNvSpPr>
@@ -1812,13 +2641,16 @@
             <p:ph type="dt" sz="half" idx="10"/>
           </p:nvPr>
         </p:nvSpPr>
-        <p:spPr/>
-        <p:txBody>
-          <a:bodyPr/>
-          <a:lstStyle/>
-          <a:p>
+        <p:spPr bwMode="auto"/>
+        <p:txBody>
+          <a:bodyPr/>
+          <a:lstStyle/>
+          <a:p>
+            <a:pPr>
+              <a:defRPr/>
+            </a:pPr>
             <a:fld id="{98CC69C8-8B53-4FDF-AAB7-FE39925D3764}" type="datetimeFigureOut">
-              <a:rPr lang="en-US" smtClean="0"/>
+              <a:rPr lang="en-US"/>
               <a:t>3/31/2026</a:t>
             </a:fld>
             <a:endParaRPr lang="en-US"/>
@@ -1827,7 +2659,7 @@
       </p:sp>
       <p:sp>
         <p:nvSpPr>
-          <p:cNvPr id="3" name="Footer Placeholder 2"/>
+          <p:cNvPr id="947247751" name="Footer Placeholder 2"/>
           <p:cNvSpPr>
             <a:spLocks noGrp="1"/>
           </p:cNvSpPr>
@@ -1835,18 +2667,21 @@
             <p:ph type="ftr" sz="quarter" idx="11"/>
           </p:nvPr>
         </p:nvSpPr>
-        <p:spPr/>
-        <p:txBody>
-          <a:bodyPr/>
-          <a:lstStyle/>
-          <a:p>
-            <a:endParaRPr lang="en-US"/>
-          </a:p>
-        </p:txBody>
-      </p:sp>
-      <p:sp>
-        <p:nvSpPr>
-          <p:cNvPr id="4" name="Slide Number Placeholder 3"/>
+        <p:spPr bwMode="auto"/>
+        <p:txBody>
+          <a:bodyPr/>
+          <a:lstStyle/>
+          <a:p>
+            <a:pPr>
+              <a:defRPr/>
+            </a:pPr>
+            <a:endParaRPr lang="en-US"/>
+          </a:p>
+        </p:txBody>
+      </p:sp>
+      <p:sp>
+        <p:nvSpPr>
+          <p:cNvPr id="784832127" name="Slide Number Placeholder 3"/>
           <p:cNvSpPr>
             <a:spLocks noGrp="1"/>
           </p:cNvSpPr>
@@ -1854,13 +2689,16 @@
             <p:ph type="sldNum" sz="quarter" idx="12"/>
           </p:nvPr>
         </p:nvSpPr>
-        <p:spPr/>
-        <p:txBody>
-          <a:bodyPr/>
-          <a:lstStyle/>
-          <a:p>
+        <p:spPr bwMode="auto"/>
+        <p:txBody>
+          <a:bodyPr/>
+          <a:lstStyle/>
+          <a:p>
+            <a:pPr>
+              <a:defRPr/>
+            </a:pPr>
             <a:fld id="{F6B844F4-D5BB-4B6C-9919-0766FCF7BAC1}" type="slidenum">
-              <a:rPr lang="en-US" smtClean="0"/>
+              <a:rPr lang="en-US"/>
               <a:t>‹#›</a:t>
             </a:fld>
             <a:endParaRPr lang="en-US"/>
@@ -1868,11 +2706,6 @@
         </p:txBody>
       </p:sp>
     </p:spTree>
-    <p:extLst>
-      <p:ext uri="{BB962C8B-B14F-4D97-AF65-F5344CB8AC3E}">
-        <p14:creationId xmlns:p14="http://schemas.microsoft.com/office/powerpoint/2010/main" val="488086"/>
-      </p:ext>
-    </p:extLst>
   </p:cSld>
   <p:clrMapOvr>
     <a:masterClrMapping/>
@@ -1881,7 +2714,7 @@
 </file>
 
 <file path=ppt/slideLayouts/slideLayout8.xml><?xml version="1.0" encoding="utf-8"?>
-<p:sldLayout xmlns:a="http://schemas.openxmlformats.org/drawingml/2006/main" xmlns:r="http://schemas.openxmlformats.org/officeDocument/2006/relationships" xmlns:p="http://schemas.openxmlformats.org/presentationml/2006/main" type="objTx" preserve="1">
+<p:sldLayout xmlns:a="http://schemas.openxmlformats.org/drawingml/2006/main" xmlns:r="http://schemas.openxmlformats.org/officeDocument/2006/relationships" xmlns:p="http://schemas.openxmlformats.org/presentationml/2006/main" xmlns:m="http://schemas.openxmlformats.org/officeDocument/2006/math" xmlns:w="http://schemas.openxmlformats.org/wordprocessingml/2006/main" matchingName="" preserve="1" showMasterPhAnim="0" showMasterSp="1" type="objTx" userDrawn="1">
   <p:cSld name="Content with Caption">
     <p:spTree>
       <p:nvGrpSpPr>
@@ -1889,7 +2722,7 @@
         <p:cNvGrpSpPr/>
         <p:nvPr/>
       </p:nvGrpSpPr>
-      <p:grpSpPr>
+      <p:grpSpPr bwMode="auto">
         <a:xfrm>
           <a:off x="0" y="0"/>
           <a:ext cx="0" cy="0"/>
@@ -1899,7 +2732,7 @@
       </p:grpSpPr>
       <p:sp>
         <p:nvSpPr>
-          <p:cNvPr id="2" name="Title 1"/>
+          <p:cNvPr id="1492334691" name="Title 1"/>
           <p:cNvSpPr>
             <a:spLocks noGrp="1"/>
           </p:cNvSpPr>
@@ -1907,7 +2740,7 @@
             <p:ph type="title"/>
           </p:nvPr>
         </p:nvSpPr>
-        <p:spPr>
+        <p:spPr bwMode="auto">
           <a:xfrm>
             <a:off x="839788" y="457200"/>
             <a:ext cx="3932237" cy="1600200"/>
@@ -1921,8 +2754,11 @@
             </a:lvl1pPr>
           </a:lstStyle>
           <a:p>
-            <a:r>
-              <a:rPr lang="en-US" smtClean="0"/>
+            <a:pPr>
+              <a:defRPr/>
+            </a:pPr>
+            <a:r>
+              <a:rPr lang="en-US"/>
               <a:t>Click to edit Master title style</a:t>
             </a:r>
             <a:endParaRPr lang="en-US"/>
@@ -1931,7 +2767,7 @@
       </p:sp>
       <p:sp>
         <p:nvSpPr>
-          <p:cNvPr id="3" name="Content Placeholder 2"/>
+          <p:cNvPr id="1092362189" name="Content Placeholder 2"/>
           <p:cNvSpPr>
             <a:spLocks noGrp="1"/>
           </p:cNvSpPr>
@@ -1939,7 +2775,7 @@
             <p:ph idx="1"/>
           </p:nvPr>
         </p:nvSpPr>
-        <p:spPr>
+        <p:spPr bwMode="auto">
           <a:xfrm>
             <a:off x="5183188" y="987425"/>
             <a:ext cx="6172200" cy="4873625"/>
@@ -1977,37 +2813,51 @@
             </a:lvl9pPr>
           </a:lstStyle>
           <a:p>
-            <a:pPr lvl="0"/>
-            <a:r>
-              <a:rPr lang="en-US" smtClean="0"/>
+            <a:pPr lvl="0">
+              <a:defRPr/>
+            </a:pPr>
+            <a:r>
+              <a:rPr lang="en-US"/>
               <a:t>Edit Master text styles</a:t>
             </a:r>
-          </a:p>
-          <a:p>
-            <a:pPr lvl="1"/>
-            <a:r>
-              <a:rPr lang="en-US" smtClean="0"/>
+            <a:endParaRPr/>
+          </a:p>
+          <a:p>
+            <a:pPr lvl="1">
+              <a:defRPr/>
+            </a:pPr>
+            <a:r>
+              <a:rPr lang="en-US"/>
               <a:t>Second level</a:t>
             </a:r>
-          </a:p>
-          <a:p>
-            <a:pPr lvl="2"/>
-            <a:r>
-              <a:rPr lang="en-US" smtClean="0"/>
+            <a:endParaRPr/>
+          </a:p>
+          <a:p>
+            <a:pPr lvl="2">
+              <a:defRPr/>
+            </a:pPr>
+            <a:r>
+              <a:rPr lang="en-US"/>
               <a:t>Third level</a:t>
             </a:r>
-          </a:p>
-          <a:p>
-            <a:pPr lvl="3"/>
-            <a:r>
-              <a:rPr lang="en-US" smtClean="0"/>
+            <a:endParaRPr/>
+          </a:p>
+          <a:p>
+            <a:pPr lvl="3">
+              <a:defRPr/>
+            </a:pPr>
+            <a:r>
+              <a:rPr lang="en-US"/>
               <a:t>Fourth level</a:t>
             </a:r>
-          </a:p>
-          <a:p>
-            <a:pPr lvl="4"/>
-            <a:r>
-              <a:rPr lang="en-US" smtClean="0"/>
+            <a:endParaRPr/>
+          </a:p>
+          <a:p>
+            <a:pPr lvl="4">
+              <a:defRPr/>
+            </a:pPr>
+            <a:r>
+              <a:rPr lang="en-US"/>
               <a:t>Fifth level</a:t>
             </a:r>
             <a:endParaRPr lang="en-US"/>
@@ -2016,7 +2866,7 @@
       </p:sp>
       <p:sp>
         <p:nvSpPr>
-          <p:cNvPr id="4" name="Text Placeholder 3"/>
+          <p:cNvPr id="1722283106" name="Text Placeholder 3"/>
           <p:cNvSpPr>
             <a:spLocks noGrp="1"/>
           </p:cNvSpPr>
@@ -2024,7 +2874,7 @@
             <p:ph type="body" sz="half" idx="2"/>
           </p:nvPr>
         </p:nvSpPr>
-        <p:spPr>
+        <p:spPr bwMode="auto">
           <a:xfrm>
             <a:off x="839788" y="2057400"/>
             <a:ext cx="3932237" cy="3811588"/>
@@ -2071,17 +2921,20 @@
             </a:lvl9pPr>
           </a:lstStyle>
           <a:p>
-            <a:pPr lvl="0"/>
-            <a:r>
-              <a:rPr lang="en-US" smtClean="0"/>
+            <a:pPr lvl="0">
+              <a:defRPr/>
+            </a:pPr>
+            <a:r>
+              <a:rPr lang="en-US"/>
               <a:t>Edit Master text styles</a:t>
             </a:r>
-          </a:p>
-        </p:txBody>
-      </p:sp>
-      <p:sp>
-        <p:nvSpPr>
-          <p:cNvPr id="5" name="Date Placeholder 4"/>
+            <a:endParaRPr/>
+          </a:p>
+        </p:txBody>
+      </p:sp>
+      <p:sp>
+        <p:nvSpPr>
+          <p:cNvPr id="1159494478" name="Date Placeholder 4"/>
           <p:cNvSpPr>
             <a:spLocks noGrp="1"/>
           </p:cNvSpPr>
@@ -2089,13 +2942,16 @@
             <p:ph type="dt" sz="half" idx="10"/>
           </p:nvPr>
         </p:nvSpPr>
-        <p:spPr/>
-        <p:txBody>
-          <a:bodyPr/>
-          <a:lstStyle/>
-          <a:p>
+        <p:spPr bwMode="auto"/>
+        <p:txBody>
+          <a:bodyPr/>
+          <a:lstStyle/>
+          <a:p>
+            <a:pPr>
+              <a:defRPr/>
+            </a:pPr>
             <a:fld id="{98CC69C8-8B53-4FDF-AAB7-FE39925D3764}" type="datetimeFigureOut">
-              <a:rPr lang="en-US" smtClean="0"/>
+              <a:rPr lang="en-US"/>
               <a:t>3/31/2026</a:t>
             </a:fld>
             <a:endParaRPr lang="en-US"/>
@@ -2104,7 +2960,7 @@
       </p:sp>
       <p:sp>
         <p:nvSpPr>
-          <p:cNvPr id="6" name="Footer Placeholder 5"/>
+          <p:cNvPr id="47911931" name="Footer Placeholder 5"/>
           <p:cNvSpPr>
             <a:spLocks noGrp="1"/>
           </p:cNvSpPr>
@@ -2112,18 +2968,21 @@
             <p:ph type="ftr" sz="quarter" idx="11"/>
           </p:nvPr>
         </p:nvSpPr>
-        <p:spPr/>
-        <p:txBody>
-          <a:bodyPr/>
-          <a:lstStyle/>
-          <a:p>
-            <a:endParaRPr lang="en-US"/>
-          </a:p>
-        </p:txBody>
-      </p:sp>
-      <p:sp>
-        <p:nvSpPr>
-          <p:cNvPr id="7" name="Slide Number Placeholder 6"/>
+        <p:spPr bwMode="auto"/>
+        <p:txBody>
+          <a:bodyPr/>
+          <a:lstStyle/>
+          <a:p>
+            <a:pPr>
+              <a:defRPr/>
+            </a:pPr>
+            <a:endParaRPr lang="en-US"/>
+          </a:p>
+        </p:txBody>
+      </p:sp>
+      <p:sp>
+        <p:nvSpPr>
+          <p:cNvPr id="2113158316" name="Slide Number Placeholder 6"/>
           <p:cNvSpPr>
             <a:spLocks noGrp="1"/>
           </p:cNvSpPr>
@@ -2131,13 +2990,16 @@
             <p:ph type="sldNum" sz="quarter" idx="12"/>
           </p:nvPr>
         </p:nvSpPr>
-        <p:spPr/>
-        <p:txBody>
-          <a:bodyPr/>
-          <a:lstStyle/>
-          <a:p>
+        <p:spPr bwMode="auto"/>
+        <p:txBody>
+          <a:bodyPr/>
+          <a:lstStyle/>
+          <a:p>
+            <a:pPr>
+              <a:defRPr/>
+            </a:pPr>
             <a:fld id="{F6B844F4-D5BB-4B6C-9919-0766FCF7BAC1}" type="slidenum">
-              <a:rPr lang="en-US" smtClean="0"/>
+              <a:rPr lang="en-US"/>
               <a:t>‹#›</a:t>
             </a:fld>
             <a:endParaRPr lang="en-US"/>
@@ -2145,11 +3007,6 @@
         </p:txBody>
       </p:sp>
     </p:spTree>
-    <p:extLst>
-      <p:ext uri="{BB962C8B-B14F-4D97-AF65-F5344CB8AC3E}">
-        <p14:creationId xmlns:p14="http://schemas.microsoft.com/office/powerpoint/2010/main" val="3192606253"/>
-      </p:ext>
-    </p:extLst>
   </p:cSld>
   <p:clrMapOvr>
     <a:masterClrMapping/>
@@ -2158,7 +3015,7 @@
 </file>
 
 <file path=ppt/slideLayouts/slideLayout9.xml><?xml version="1.0" encoding="utf-8"?>
-<p:sldLayout xmlns:a="http://schemas.openxmlformats.org/drawingml/2006/main" xmlns:r="http://schemas.openxmlformats.org/officeDocument/2006/relationships" xmlns:p="http://schemas.openxmlformats.org/presentationml/2006/main" type="picTx" preserve="1">
+<p:sldLayout xmlns:a="http://schemas.openxmlformats.org/drawingml/2006/main" xmlns:r="http://schemas.openxmlformats.org/officeDocument/2006/relationships" xmlns:p="http://schemas.openxmlformats.org/presentationml/2006/main" xmlns:m="http://schemas.openxmlformats.org/officeDocument/2006/math" xmlns:w="http://schemas.openxmlformats.org/wordprocessingml/2006/main" matchingName="" preserve="1" showMasterPhAnim="0" showMasterSp="1" type="picTx" userDrawn="1">
   <p:cSld name="Picture with Caption">
     <p:spTree>
       <p:nvGrpSpPr>
@@ -2166,7 +3023,7 @@
         <p:cNvGrpSpPr/>
         <p:nvPr/>
       </p:nvGrpSpPr>
-      <p:grpSpPr>
+      <p:grpSpPr bwMode="auto">
         <a:xfrm>
           <a:off x="0" y="0"/>
           <a:ext cx="0" cy="0"/>
@@ -2176,7 +3033,7 @@
       </p:grpSpPr>
       <p:sp>
         <p:nvSpPr>
-          <p:cNvPr id="2" name="Title 1"/>
+          <p:cNvPr id="1742865846" name="Title 1"/>
           <p:cNvSpPr>
             <a:spLocks noGrp="1"/>
           </p:cNvSpPr>
@@ -2184,7 +3041,7 @@
             <p:ph type="title"/>
           </p:nvPr>
         </p:nvSpPr>
-        <p:spPr>
+        <p:spPr bwMode="auto">
           <a:xfrm>
             <a:off x="839788" y="457200"/>
             <a:ext cx="3932237" cy="1600200"/>
@@ -2198,8 +3055,11 @@
             </a:lvl1pPr>
           </a:lstStyle>
           <a:p>
-            <a:r>
-              <a:rPr lang="en-US" smtClean="0"/>
+            <a:pPr>
+              <a:defRPr/>
+            </a:pPr>
+            <a:r>
+              <a:rPr lang="en-US"/>
               <a:t>Click to edit Master title style</a:t>
             </a:r>
             <a:endParaRPr lang="en-US"/>
@@ -2208,7 +3068,7 @@
       </p:sp>
       <p:sp>
         <p:nvSpPr>
-          <p:cNvPr id="3" name="Picture Placeholder 2"/>
+          <p:cNvPr id="498164596" name="Picture Placeholder 2"/>
           <p:cNvSpPr>
             <a:spLocks noGrp="1"/>
           </p:cNvSpPr>
@@ -2216,7 +3076,7 @@
             <p:ph type="pic" idx="1"/>
           </p:nvPr>
         </p:nvSpPr>
-        <p:spPr>
+        <p:spPr bwMode="auto">
           <a:xfrm>
             <a:off x="5183188" y="987425"/>
             <a:ext cx="6172200" cy="4873625"/>
@@ -2263,13 +3123,16 @@
             </a:lvl9pPr>
           </a:lstStyle>
           <a:p>
-            <a:endParaRPr lang="en-US"/>
-          </a:p>
-        </p:txBody>
-      </p:sp>
-      <p:sp>
-        <p:nvSpPr>
-          <p:cNvPr id="4" name="Text Placeholder 3"/>
+            <a:pPr>
+              <a:defRPr/>
+            </a:pPr>
+            <a:endParaRPr lang="en-US"/>
+          </a:p>
+        </p:txBody>
+      </p:sp>
+      <p:sp>
+        <p:nvSpPr>
+          <p:cNvPr id="890419743" name="Text Placeholder 3"/>
           <p:cNvSpPr>
             <a:spLocks noGrp="1"/>
           </p:cNvSpPr>
@@ -2277,7 +3140,7 @@
             <p:ph type="body" sz="half" idx="2"/>
           </p:nvPr>
         </p:nvSpPr>
-        <p:spPr>
+        <p:spPr bwMode="auto">
           <a:xfrm>
             <a:off x="839788" y="2057400"/>
             <a:ext cx="3932237" cy="3811588"/>
@@ -2324,17 +3187,20 @@
             </a:lvl9pPr>
           </a:lstStyle>
           <a:p>
-            <a:pPr lvl="0"/>
-            <a:r>
-              <a:rPr lang="en-US" smtClean="0"/>
+            <a:pPr lvl="0">
+              <a:defRPr/>
+            </a:pPr>
+            <a:r>
+              <a:rPr lang="en-US"/>
               <a:t>Edit Master text styles</a:t>
             </a:r>
-          </a:p>
-        </p:txBody>
-      </p:sp>
-      <p:sp>
-        <p:nvSpPr>
-          <p:cNvPr id="5" name="Date Placeholder 4"/>
+            <a:endParaRPr/>
+          </a:p>
+        </p:txBody>
+      </p:sp>
+      <p:sp>
+        <p:nvSpPr>
+          <p:cNvPr id="945178442" name="Date Placeholder 4"/>
           <p:cNvSpPr>
             <a:spLocks noGrp="1"/>
           </p:cNvSpPr>
@@ -2342,13 +3208,16 @@
             <p:ph type="dt" sz="half" idx="10"/>
           </p:nvPr>
         </p:nvSpPr>
-        <p:spPr/>
-        <p:txBody>
-          <a:bodyPr/>
-          <a:lstStyle/>
-          <a:p>
+        <p:spPr bwMode="auto"/>
+        <p:txBody>
+          <a:bodyPr/>
+          <a:lstStyle/>
+          <a:p>
+            <a:pPr>
+              <a:defRPr/>
+            </a:pPr>
             <a:fld id="{98CC69C8-8B53-4FDF-AAB7-FE39925D3764}" type="datetimeFigureOut">
-              <a:rPr lang="en-US" smtClean="0"/>
+              <a:rPr lang="en-US"/>
               <a:t>3/31/2026</a:t>
             </a:fld>
             <a:endParaRPr lang="en-US"/>
@@ -2357,7 +3226,7 @@
       </p:sp>
       <p:sp>
         <p:nvSpPr>
-          <p:cNvPr id="6" name="Footer Placeholder 5"/>
+          <p:cNvPr id="1613921253" name="Footer Placeholder 5"/>
           <p:cNvSpPr>
             <a:spLocks noGrp="1"/>
           </p:cNvSpPr>
@@ -2365,18 +3234,21 @@
             <p:ph type="ftr" sz="quarter" idx="11"/>
           </p:nvPr>
         </p:nvSpPr>
-        <p:spPr/>
-        <p:txBody>
-          <a:bodyPr/>
-          <a:lstStyle/>
-          <a:p>
-            <a:endParaRPr lang="en-US"/>
-          </a:p>
-        </p:txBody>
-      </p:sp>
-      <p:sp>
-        <p:nvSpPr>
-          <p:cNvPr id="7" name="Slide Number Placeholder 6"/>
+        <p:spPr bwMode="auto"/>
+        <p:txBody>
+          <a:bodyPr/>
+          <a:lstStyle/>
+          <a:p>
+            <a:pPr>
+              <a:defRPr/>
+            </a:pPr>
+            <a:endParaRPr lang="en-US"/>
+          </a:p>
+        </p:txBody>
+      </p:sp>
+      <p:sp>
+        <p:nvSpPr>
+          <p:cNvPr id="1308082388" name="Slide Number Placeholder 6"/>
           <p:cNvSpPr>
             <a:spLocks noGrp="1"/>
           </p:cNvSpPr>
@@ -2384,13 +3256,16 @@
             <p:ph type="sldNum" sz="quarter" idx="12"/>
           </p:nvPr>
         </p:nvSpPr>
-        <p:spPr/>
-        <p:txBody>
-          <a:bodyPr/>
-          <a:lstStyle/>
-          <a:p>
+        <p:spPr bwMode="auto"/>
+        <p:txBody>
+          <a:bodyPr/>
+          <a:lstStyle/>
+          <a:p>
+            <a:pPr>
+              <a:defRPr/>
+            </a:pPr>
             <a:fld id="{F6B844F4-D5BB-4B6C-9919-0766FCF7BAC1}" type="slidenum">
-              <a:rPr lang="en-US" smtClean="0"/>
+              <a:rPr lang="en-US"/>
               <a:t>‹#›</a:t>
             </a:fld>
             <a:endParaRPr lang="en-US"/>
@@ -2398,11 +3273,6 @@
         </p:txBody>
       </p:sp>
     </p:spTree>
-    <p:extLst>
-      <p:ext uri="{BB962C8B-B14F-4D97-AF65-F5344CB8AC3E}">
-        <p14:creationId xmlns:p14="http://schemas.microsoft.com/office/powerpoint/2010/main" val="3695446514"/>
-      </p:ext>
-    </p:extLst>
   </p:cSld>
   <p:clrMapOvr>
     <a:masterClrMapping/>
@@ -2411,8 +3281,8 @@
 </file>
 
 <file path=ppt/slideMasters/slideMaster1.xml><?xml version="1.0" encoding="utf-8"?>
-<p:sldMaster xmlns:a="http://schemas.openxmlformats.org/drawingml/2006/main" xmlns:r="http://schemas.openxmlformats.org/officeDocument/2006/relationships" xmlns:p="http://schemas.openxmlformats.org/presentationml/2006/main">
-  <p:cSld>
+<p:sldMaster xmlns:a="http://schemas.openxmlformats.org/drawingml/2006/main" xmlns:r="http://schemas.openxmlformats.org/officeDocument/2006/relationships" xmlns:p="http://schemas.openxmlformats.org/presentationml/2006/main" xmlns:m="http://schemas.openxmlformats.org/officeDocument/2006/math" xmlns:w="http://schemas.openxmlformats.org/wordprocessingml/2006/main" preserve="0">
+  <p:cSld name="">
     <p:bg>
       <p:bgRef idx="1001">
         <a:schemeClr val="bg1"/>
@@ -2424,7 +3294,7 @@
         <p:cNvGrpSpPr/>
         <p:nvPr/>
       </p:nvGrpSpPr>
-      <p:grpSpPr>
+      <p:grpSpPr bwMode="auto">
         <a:xfrm>
           <a:off x="0" y="0"/>
           <a:ext cx="0" cy="0"/>
@@ -2434,7 +3304,7 @@
       </p:grpSpPr>
       <p:sp>
         <p:nvSpPr>
-          <p:cNvPr id="2" name="Title Placeholder 1"/>
+          <p:cNvPr id="268068587" name="Title Placeholder 1"/>
           <p:cNvSpPr>
             <a:spLocks noGrp="1"/>
           </p:cNvSpPr>
@@ -2442,7 +3312,7 @@
             <p:ph type="title"/>
           </p:nvPr>
         </p:nvSpPr>
-        <p:spPr>
+        <p:spPr bwMode="auto">
           <a:xfrm>
             <a:off x="838200" y="365125"/>
             <a:ext cx="10515600" cy="1325563"/>
@@ -2457,8 +3327,11 @@
           </a:bodyPr>
           <a:lstStyle/>
           <a:p>
-            <a:r>
-              <a:rPr lang="en-US" smtClean="0"/>
+            <a:pPr>
+              <a:defRPr/>
+            </a:pPr>
+            <a:r>
+              <a:rPr lang="en-US"/>
               <a:t>Click to edit Master title style</a:t>
             </a:r>
             <a:endParaRPr lang="en-US"/>
@@ -2467,7 +3340,7 @@
       </p:sp>
       <p:sp>
         <p:nvSpPr>
-          <p:cNvPr id="3" name="Text Placeholder 2"/>
+          <p:cNvPr id="1448340664" name="Text Placeholder 2"/>
           <p:cNvSpPr>
             <a:spLocks noGrp="1"/>
           </p:cNvSpPr>
@@ -2475,7 +3348,7 @@
             <p:ph type="body" idx="1"/>
           </p:nvPr>
         </p:nvSpPr>
-        <p:spPr>
+        <p:spPr bwMode="auto">
           <a:xfrm>
             <a:off x="838200" y="1825625"/>
             <a:ext cx="10515600" cy="4351338"/>
@@ -2490,37 +3363,51 @@
           </a:bodyPr>
           <a:lstStyle/>
           <a:p>
-            <a:pPr lvl="0"/>
-            <a:r>
-              <a:rPr lang="en-US" smtClean="0"/>
+            <a:pPr lvl="0">
+              <a:defRPr/>
+            </a:pPr>
+            <a:r>
+              <a:rPr lang="en-US"/>
               <a:t>Edit Master text styles</a:t>
             </a:r>
-          </a:p>
-          <a:p>
-            <a:pPr lvl="1"/>
-            <a:r>
-              <a:rPr lang="en-US" smtClean="0"/>
+            <a:endParaRPr/>
+          </a:p>
+          <a:p>
+            <a:pPr lvl="1">
+              <a:defRPr/>
+            </a:pPr>
+            <a:r>
+              <a:rPr lang="en-US"/>
               <a:t>Second level</a:t>
             </a:r>
-          </a:p>
-          <a:p>
-            <a:pPr lvl="2"/>
-            <a:r>
-              <a:rPr lang="en-US" smtClean="0"/>
+            <a:endParaRPr/>
+          </a:p>
+          <a:p>
+            <a:pPr lvl="2">
+              <a:defRPr/>
+            </a:pPr>
+            <a:r>
+              <a:rPr lang="en-US"/>
               <a:t>Third level</a:t>
             </a:r>
-          </a:p>
-          <a:p>
-            <a:pPr lvl="3"/>
-            <a:r>
-              <a:rPr lang="en-US" smtClean="0"/>
+            <a:endParaRPr/>
+          </a:p>
+          <a:p>
+            <a:pPr lvl="3">
+              <a:defRPr/>
+            </a:pPr>
+            <a:r>
+              <a:rPr lang="en-US"/>
               <a:t>Fourth level</a:t>
             </a:r>
-          </a:p>
-          <a:p>
-            <a:pPr lvl="4"/>
-            <a:r>
-              <a:rPr lang="en-US" smtClean="0"/>
+            <a:endParaRPr/>
+          </a:p>
+          <a:p>
+            <a:pPr lvl="4">
+              <a:defRPr/>
+            </a:pPr>
+            <a:r>
+              <a:rPr lang="en-US"/>
               <a:t>Fifth level</a:t>
             </a:r>
             <a:endParaRPr lang="en-US"/>
@@ -2529,7 +3416,7 @@
       </p:sp>
       <p:sp>
         <p:nvSpPr>
-          <p:cNvPr id="4" name="Date Placeholder 3"/>
+          <p:cNvPr id="1805904928" name="Date Placeholder 3"/>
           <p:cNvSpPr>
             <a:spLocks noGrp="1"/>
           </p:cNvSpPr>
@@ -2537,7 +3424,7 @@
             <p:ph type="dt" sz="half" idx="2"/>
           </p:nvPr>
         </p:nvSpPr>
-        <p:spPr>
+        <p:spPr bwMode="auto">
           <a:xfrm>
             <a:off x="838200" y="6356350"/>
             <a:ext cx="2743200" cy="365125"/>
@@ -2560,8 +3447,11 @@
             </a:lvl1pPr>
           </a:lstStyle>
           <a:p>
+            <a:pPr>
+              <a:defRPr/>
+            </a:pPr>
             <a:fld id="{98CC69C8-8B53-4FDF-AAB7-FE39925D3764}" type="datetimeFigureOut">
-              <a:rPr lang="en-US" smtClean="0"/>
+              <a:rPr lang="en-US"/>
               <a:t>3/31/2026</a:t>
             </a:fld>
             <a:endParaRPr lang="en-US"/>
@@ -2570,7 +3460,7 @@
       </p:sp>
       <p:sp>
         <p:nvSpPr>
-          <p:cNvPr id="5" name="Footer Placeholder 4"/>
+          <p:cNvPr id="49549113" name="Footer Placeholder 4"/>
           <p:cNvSpPr>
             <a:spLocks noGrp="1"/>
           </p:cNvSpPr>
@@ -2578,7 +3468,7 @@
             <p:ph type="ftr" sz="quarter" idx="3"/>
           </p:nvPr>
         </p:nvSpPr>
-        <p:spPr>
+        <p:spPr bwMode="auto">
           <a:xfrm>
             <a:off x="4038600" y="6356350"/>
             <a:ext cx="4114800" cy="365125"/>
@@ -2601,13 +3491,16 @@
             </a:lvl1pPr>
           </a:lstStyle>
           <a:p>
-            <a:endParaRPr lang="en-US"/>
-          </a:p>
-        </p:txBody>
-      </p:sp>
-      <p:sp>
-        <p:nvSpPr>
-          <p:cNvPr id="6" name="Slide Number Placeholder 5"/>
+            <a:pPr>
+              <a:defRPr/>
+            </a:pPr>
+            <a:endParaRPr lang="en-US"/>
+          </a:p>
+        </p:txBody>
+      </p:sp>
+      <p:sp>
+        <p:nvSpPr>
+          <p:cNvPr id="1126278037" name="Slide Number Placeholder 5"/>
           <p:cNvSpPr>
             <a:spLocks noGrp="1"/>
           </p:cNvSpPr>
@@ -2615,7 +3508,7 @@
             <p:ph type="sldNum" sz="quarter" idx="4"/>
           </p:nvPr>
         </p:nvSpPr>
-        <p:spPr>
+        <p:spPr bwMode="auto">
           <a:xfrm>
             <a:off x="8610600" y="6356350"/>
             <a:ext cx="2743200" cy="365125"/>
@@ -2638,8 +3531,11 @@
             </a:lvl1pPr>
           </a:lstStyle>
           <a:p>
+            <a:pPr>
+              <a:defRPr/>
+            </a:pPr>
             <a:fld id="{F6B844F4-D5BB-4B6C-9919-0766FCF7BAC1}" type="slidenum">
-              <a:rPr lang="en-US" smtClean="0"/>
+              <a:rPr lang="en-US"/>
               <a:t>‹#›</a:t>
             </a:fld>
             <a:endParaRPr lang="en-US"/>
@@ -2647,11 +3543,6 @@
         </p:txBody>
       </p:sp>
     </p:spTree>
-    <p:extLst>
-      <p:ext uri="{BB962C8B-B14F-4D97-AF65-F5344CB8AC3E}">
-        <p14:creationId xmlns:p14="http://schemas.microsoft.com/office/powerpoint/2010/main" val="2242834251"/>
-      </p:ext>
-    </p:extLst>
   </p:cSld>
   <p:clrMap bg1="lt1" tx1="dk1" bg2="lt2" tx2="dk2" accent1="accent1" accent2="accent2" accent3="accent3" accent4="accent4" accent5="accent5" accent6="accent6" hlink="hlink" folHlink="folHlink"/>
   <p:sldLayoutIdLst>
@@ -2669,15 +3560,15 @@
   </p:sldLayoutIdLst>
   <p:txStyles>
     <p:titleStyle>
-      <a:lvl1pPr algn="l" defTabSz="914400" rtl="0" eaLnBrk="1" latinLnBrk="0" hangingPunct="1">
+      <a:lvl1pPr algn="l" defTabSz="914400" rtl="0">
         <a:lnSpc>
           <a:spcPct val="90000"/>
         </a:lnSpc>
         <a:spcBef>
-          <a:spcPct val="0"/>
+          <a:spcPts val="0"/>
         </a:spcBef>
         <a:buNone/>
-        <a:defRPr sz="4400" kern="1200">
+        <a:defRPr sz="4400">
           <a:solidFill>
             <a:schemeClr val="tx1"/>
           </a:solidFill>
@@ -2688,16 +3579,16 @@
       </a:lvl1pPr>
     </p:titleStyle>
     <p:bodyStyle>
-      <a:lvl1pPr marL="228600" indent="-228600" algn="l" defTabSz="914400" rtl="0" eaLnBrk="1" latinLnBrk="0" hangingPunct="1">
+      <a:lvl1pPr marL="228600" indent="-228600" algn="l" defTabSz="914400" rtl="0">
         <a:lnSpc>
           <a:spcPct val="90000"/>
         </a:lnSpc>
         <a:spcBef>
           <a:spcPts val="1000"/>
         </a:spcBef>
-        <a:buFont typeface="Arial" panose="020B0604020202020204" pitchFamily="34" charset="0"/>
+        <a:buFont typeface="Arial"/>
         <a:buChar char="•"/>
-        <a:defRPr sz="2800" kern="1200">
+        <a:defRPr sz="2800">
           <a:solidFill>
             <a:schemeClr val="tx1"/>
           </a:solidFill>
@@ -2706,16 +3597,16 @@
           <a:cs typeface="+mn-cs"/>
         </a:defRPr>
       </a:lvl1pPr>
-      <a:lvl2pPr marL="685800" indent="-228600" algn="l" defTabSz="914400" rtl="0" eaLnBrk="1" latinLnBrk="0" hangingPunct="1">
+      <a:lvl2pPr marL="685800" indent="-228600" algn="l" defTabSz="914400" rtl="0">
         <a:lnSpc>
           <a:spcPct val="90000"/>
         </a:lnSpc>
         <a:spcBef>
           <a:spcPts val="500"/>
         </a:spcBef>
-        <a:buFont typeface="Arial" panose="020B0604020202020204" pitchFamily="34" charset="0"/>
+        <a:buFont typeface="Arial"/>
         <a:buChar char="•"/>
-        <a:defRPr sz="2400" kern="1200">
+        <a:defRPr sz="2400">
           <a:solidFill>
             <a:schemeClr val="tx1"/>
           </a:solidFill>
@@ -2724,16 +3615,16 @@
           <a:cs typeface="+mn-cs"/>
         </a:defRPr>
       </a:lvl2pPr>
-      <a:lvl3pPr marL="1143000" indent="-228600" algn="l" defTabSz="914400" rtl="0" eaLnBrk="1" latinLnBrk="0" hangingPunct="1">
+      <a:lvl3pPr marL="1143000" indent="-228600" algn="l" defTabSz="914400" rtl="0">
         <a:lnSpc>
           <a:spcPct val="90000"/>
         </a:lnSpc>
         <a:spcBef>
           <a:spcPts val="500"/>
         </a:spcBef>
-        <a:buFont typeface="Arial" panose="020B0604020202020204" pitchFamily="34" charset="0"/>
+        <a:buFont typeface="Arial"/>
         <a:buChar char="•"/>
-        <a:defRPr sz="2000" kern="1200">
+        <a:defRPr sz="2000">
           <a:solidFill>
             <a:schemeClr val="tx1"/>
           </a:solidFill>
@@ -2742,16 +3633,16 @@
           <a:cs typeface="+mn-cs"/>
         </a:defRPr>
       </a:lvl3pPr>
-      <a:lvl4pPr marL="1600200" indent="-228600" algn="l" defTabSz="914400" rtl="0" eaLnBrk="1" latinLnBrk="0" hangingPunct="1">
+      <a:lvl4pPr marL="1600200" indent="-228600" algn="l" defTabSz="914400" rtl="0">
         <a:lnSpc>
           <a:spcPct val="90000"/>
         </a:lnSpc>
         <a:spcBef>
           <a:spcPts val="500"/>
         </a:spcBef>
-        <a:buFont typeface="Arial" panose="020B0604020202020204" pitchFamily="34" charset="0"/>
+        <a:buFont typeface="Arial"/>
         <a:buChar char="•"/>
-        <a:defRPr sz="1800" kern="1200">
+        <a:defRPr sz="1800">
           <a:solidFill>
             <a:schemeClr val="tx1"/>
           </a:solidFill>
@@ -2760,16 +3651,16 @@
           <a:cs typeface="+mn-cs"/>
         </a:defRPr>
       </a:lvl4pPr>
-      <a:lvl5pPr marL="2057400" indent="-228600" algn="l" defTabSz="914400" rtl="0" eaLnBrk="1" latinLnBrk="0" hangingPunct="1">
+      <a:lvl5pPr marL="2057400" indent="-228600" algn="l" defTabSz="914400" rtl="0">
         <a:lnSpc>
           <a:spcPct val="90000"/>
         </a:lnSpc>
         <a:spcBef>
           <a:spcPts val="500"/>
         </a:spcBef>
-        <a:buFont typeface="Arial" panose="020B0604020202020204" pitchFamily="34" charset="0"/>
+        <a:buFont typeface="Arial"/>
         <a:buChar char="•"/>
-        <a:defRPr sz="1800" kern="1200">
+        <a:defRPr sz="1800">
           <a:solidFill>
             <a:schemeClr val="tx1"/>
           </a:solidFill>
@@ -2778,16 +3669,16 @@
           <a:cs typeface="+mn-cs"/>
         </a:defRPr>
       </a:lvl5pPr>
-      <a:lvl6pPr marL="2514600" indent="-228600" algn="l" defTabSz="914400" rtl="0" eaLnBrk="1" latinLnBrk="0" hangingPunct="1">
+      <a:lvl6pPr marL="2514600" indent="-228600" algn="l" defTabSz="914400" rtl="0">
         <a:lnSpc>
           <a:spcPct val="90000"/>
         </a:lnSpc>
         <a:spcBef>
           <a:spcPts val="500"/>
         </a:spcBef>
-        <a:buFont typeface="Arial" panose="020B0604020202020204" pitchFamily="34" charset="0"/>
+        <a:buFont typeface="Arial"/>
         <a:buChar char="•"/>
-        <a:defRPr sz="1800" kern="1200">
+        <a:defRPr sz="1800">
           <a:solidFill>
             <a:schemeClr val="tx1"/>
           </a:solidFill>
@@ -2796,16 +3687,16 @@
           <a:cs typeface="+mn-cs"/>
         </a:defRPr>
       </a:lvl6pPr>
-      <a:lvl7pPr marL="2971800" indent="-228600" algn="l" defTabSz="914400" rtl="0" eaLnBrk="1" latinLnBrk="0" hangingPunct="1">
+      <a:lvl7pPr marL="2971800" indent="-228600" algn="l" defTabSz="914400" rtl="0">
         <a:lnSpc>
           <a:spcPct val="90000"/>
         </a:lnSpc>
         <a:spcBef>
           <a:spcPts val="500"/>
         </a:spcBef>
-        <a:buFont typeface="Arial" panose="020B0604020202020204" pitchFamily="34" charset="0"/>
+        <a:buFont typeface="Arial"/>
         <a:buChar char="•"/>
-        <a:defRPr sz="1800" kern="1200">
+        <a:defRPr sz="1800">
           <a:solidFill>
             <a:schemeClr val="tx1"/>
           </a:solidFill>
@@ -2814,16 +3705,16 @@
           <a:cs typeface="+mn-cs"/>
         </a:defRPr>
       </a:lvl7pPr>
-      <a:lvl8pPr marL="3429000" indent="-228600" algn="l" defTabSz="914400" rtl="0" eaLnBrk="1" latinLnBrk="0" hangingPunct="1">
+      <a:lvl8pPr marL="3429000" indent="-228600" algn="l" defTabSz="914400" rtl="0">
         <a:lnSpc>
           <a:spcPct val="90000"/>
         </a:lnSpc>
         <a:spcBef>
           <a:spcPts val="500"/>
         </a:spcBef>
-        <a:buFont typeface="Arial" panose="020B0604020202020204" pitchFamily="34" charset="0"/>
+        <a:buFont typeface="Arial"/>
         <a:buChar char="•"/>
-        <a:defRPr sz="1800" kern="1200">
+        <a:defRPr sz="1800">
           <a:solidFill>
             <a:schemeClr val="tx1"/>
           </a:solidFill>
@@ -2832,16 +3723,16 @@
           <a:cs typeface="+mn-cs"/>
         </a:defRPr>
       </a:lvl8pPr>
-      <a:lvl9pPr marL="3886200" indent="-228600" algn="l" defTabSz="914400" rtl="0" eaLnBrk="1" latinLnBrk="0" hangingPunct="1">
+      <a:lvl9pPr marL="3886200" indent="-228600" algn="l" defTabSz="914400" rtl="0">
         <a:lnSpc>
           <a:spcPct val="90000"/>
         </a:lnSpc>
         <a:spcBef>
           <a:spcPts val="500"/>
         </a:spcBef>
-        <a:buFont typeface="Arial" panose="020B0604020202020204" pitchFamily="34" charset="0"/>
+        <a:buFont typeface="Arial"/>
         <a:buChar char="•"/>
-        <a:defRPr sz="1800" kern="1200">
+        <a:defRPr sz="1800">
           <a:solidFill>
             <a:schemeClr val="tx1"/>
           </a:solidFill>
@@ -2855,8 +3746,8 @@
       <a:defPPr>
         <a:defRPr lang="en-US"/>
       </a:defPPr>
-      <a:lvl1pPr marL="0" algn="l" defTabSz="914400" rtl="0" eaLnBrk="1" latinLnBrk="0" hangingPunct="1">
-        <a:defRPr sz="1800" kern="1200">
+      <a:lvl1pPr marL="0" algn="l" defTabSz="914400" rtl="0">
+        <a:defRPr sz="1800">
           <a:solidFill>
             <a:schemeClr val="tx1"/>
           </a:solidFill>
@@ -2865,8 +3756,8 @@
           <a:cs typeface="+mn-cs"/>
         </a:defRPr>
       </a:lvl1pPr>
-      <a:lvl2pPr marL="457200" algn="l" defTabSz="914400" rtl="0" eaLnBrk="1" latinLnBrk="0" hangingPunct="1">
-        <a:defRPr sz="1800" kern="1200">
+      <a:lvl2pPr marL="457200" algn="l" defTabSz="914400" rtl="0">
+        <a:defRPr sz="1800">
           <a:solidFill>
             <a:schemeClr val="tx1"/>
           </a:solidFill>
@@ -2875,8 +3766,8 @@
           <a:cs typeface="+mn-cs"/>
         </a:defRPr>
       </a:lvl2pPr>
-      <a:lvl3pPr marL="914400" algn="l" defTabSz="914400" rtl="0" eaLnBrk="1" latinLnBrk="0" hangingPunct="1">
-        <a:defRPr sz="1800" kern="1200">
+      <a:lvl3pPr marL="914400" algn="l" defTabSz="914400" rtl="0">
+        <a:defRPr sz="1800">
           <a:solidFill>
             <a:schemeClr val="tx1"/>
           </a:solidFill>
@@ -2885,8 +3776,8 @@
           <a:cs typeface="+mn-cs"/>
         </a:defRPr>
       </a:lvl3pPr>
-      <a:lvl4pPr marL="1371600" algn="l" defTabSz="914400" rtl="0" eaLnBrk="1" latinLnBrk="0" hangingPunct="1">
-        <a:defRPr sz="1800" kern="1200">
+      <a:lvl4pPr marL="1371600" algn="l" defTabSz="914400" rtl="0">
+        <a:defRPr sz="1800">
           <a:solidFill>
             <a:schemeClr val="tx1"/>
           </a:solidFill>
@@ -2895,8 +3786,8 @@
           <a:cs typeface="+mn-cs"/>
         </a:defRPr>
       </a:lvl4pPr>
-      <a:lvl5pPr marL="1828800" algn="l" defTabSz="914400" rtl="0" eaLnBrk="1" latinLnBrk="0" hangingPunct="1">
-        <a:defRPr sz="1800" kern="1200">
+      <a:lvl5pPr marL="1828800" algn="l" defTabSz="914400" rtl="0">
+        <a:defRPr sz="1800">
           <a:solidFill>
             <a:schemeClr val="tx1"/>
           </a:solidFill>
@@ -2905,8 +3796,8 @@
           <a:cs typeface="+mn-cs"/>
         </a:defRPr>
       </a:lvl5pPr>
-      <a:lvl6pPr marL="2286000" algn="l" defTabSz="914400" rtl="0" eaLnBrk="1" latinLnBrk="0" hangingPunct="1">
-        <a:defRPr sz="1800" kern="1200">
+      <a:lvl6pPr marL="2286000" algn="l" defTabSz="914400" rtl="0">
+        <a:defRPr sz="1800">
           <a:solidFill>
             <a:schemeClr val="tx1"/>
           </a:solidFill>
@@ -2915,8 +3806,8 @@
           <a:cs typeface="+mn-cs"/>
         </a:defRPr>
       </a:lvl6pPr>
-      <a:lvl7pPr marL="2743200" algn="l" defTabSz="914400" rtl="0" eaLnBrk="1" latinLnBrk="0" hangingPunct="1">
-        <a:defRPr sz="1800" kern="1200">
+      <a:lvl7pPr marL="2743200" algn="l" defTabSz="914400" rtl="0">
+        <a:defRPr sz="1800">
           <a:solidFill>
             <a:schemeClr val="tx1"/>
           </a:solidFill>
@@ -2925,8 +3816,8 @@
           <a:cs typeface="+mn-cs"/>
         </a:defRPr>
       </a:lvl7pPr>
-      <a:lvl8pPr marL="3200400" algn="l" defTabSz="914400" rtl="0" eaLnBrk="1" latinLnBrk="0" hangingPunct="1">
-        <a:defRPr sz="1800" kern="1200">
+      <a:lvl8pPr marL="3200400" algn="l" defTabSz="914400" rtl="0">
+        <a:defRPr sz="1800">
           <a:solidFill>
             <a:schemeClr val="tx1"/>
           </a:solidFill>
@@ -2935,8 +3826,8 @@
           <a:cs typeface="+mn-cs"/>
         </a:defRPr>
       </a:lvl8pPr>
-      <a:lvl9pPr marL="3657600" algn="l" defTabSz="914400" rtl="0" eaLnBrk="1" latinLnBrk="0" hangingPunct="1">
-        <a:defRPr sz="1800" kern="1200">
+      <a:lvl9pPr marL="3657600" algn="l" defTabSz="914400" rtl="0">
+        <a:defRPr sz="1800">
           <a:solidFill>
             <a:schemeClr val="tx1"/>
           </a:solidFill>
@@ -2951,15 +3842,15 @@
 </file>
 
 <file path=ppt/slides/slide1.xml><?xml version="1.0" encoding="utf-8"?>
-<p:sld xmlns:a="http://schemas.openxmlformats.org/drawingml/2006/main" xmlns:r="http://schemas.openxmlformats.org/officeDocument/2006/relationships" xmlns:p="http://schemas.openxmlformats.org/presentationml/2006/main">
-  <p:cSld>
+<p:sld xmlns:a="http://schemas.openxmlformats.org/drawingml/2006/main" xmlns:r="http://schemas.openxmlformats.org/officeDocument/2006/relationships" xmlns:p="http://schemas.openxmlformats.org/presentationml/2006/main" xmlns:m="http://schemas.openxmlformats.org/officeDocument/2006/math" xmlns:w="http://schemas.openxmlformats.org/wordprocessingml/2006/main" xmlns:mc="http://schemas.openxmlformats.org/markup-compatibility/2006" showMasterPhAnim="0" showMasterSp="1" show="1">
+  <p:cSld name="">
     <p:spTree>
       <p:nvGrpSpPr>
         <p:cNvPr id="1" name=""/>
         <p:cNvGrpSpPr/>
         <p:nvPr/>
       </p:nvGrpSpPr>
-      <p:grpSpPr>
+      <p:grpSpPr bwMode="auto">
         <a:xfrm>
           <a:off x="0" y="0"/>
           <a:ext cx="0" cy="0"/>
@@ -2969,7 +3860,7 @@
       </p:grpSpPr>
       <p:sp>
         <p:nvSpPr>
-          <p:cNvPr id="2" name="Title 1"/>
+          <p:cNvPr id="1981357778" name="Title 1"/>
           <p:cNvSpPr>
             <a:spLocks noGrp="1"/>
           </p:cNvSpPr>
@@ -2977,61 +3868,48 @@
             <p:ph type="ctrTitle"/>
           </p:nvPr>
         </p:nvSpPr>
-        <p:spPr/>
-        <p:txBody>
-          <a:bodyPr/>
-          <a:lstStyle/>
-          <a:p>
-            <a:r>
-              <a:rPr lang="en-US" dirty="0" smtClean="0"/>
+        <p:spPr bwMode="auto"/>
+        <p:txBody>
+          <a:bodyPr/>
+          <a:lstStyle/>
+          <a:p>
+            <a:pPr>
+              <a:defRPr/>
+            </a:pPr>
+            <a:r>
+              <a:rPr lang="en-US"/>
               <a:t>Signal Dispersion</a:t>
             </a:r>
-            <a:endParaRPr lang="en-US" dirty="0"/>
-          </a:p>
-        </p:txBody>
-      </p:sp>
-      <p:sp>
-        <p:nvSpPr>
-          <p:cNvPr id="3" name="Subtitle 2"/>
-          <p:cNvSpPr>
-            <a:spLocks noGrp="1"/>
-          </p:cNvSpPr>
-          <p:nvPr>
-            <p:ph type="subTitle" idx="1"/>
-          </p:nvPr>
-        </p:nvSpPr>
-        <p:spPr/>
-        <p:txBody>
-          <a:bodyPr/>
-          <a:lstStyle/>
-          <a:p>
             <a:endParaRPr lang="en-US"/>
           </a:p>
         </p:txBody>
       </p:sp>
     </p:spTree>
-    <p:extLst>
-      <p:ext uri="{BB962C8B-B14F-4D97-AF65-F5344CB8AC3E}">
-        <p14:creationId xmlns:p14="http://schemas.microsoft.com/office/powerpoint/2010/main" val="1499666328"/>
-      </p:ext>
-    </p:extLst>
   </p:cSld>
   <p:clrMapOvr>
     <a:masterClrMapping/>
   </p:clrMapOvr>
+  <mc:AlternateContent xmlns:mc="http://schemas.openxmlformats.org/markup-compatibility/2006">
+    <mc:Choice xmlns:p159="http://schemas.microsoft.com/office/powerpoint/2015/09/main" xmlns:p14="http://schemas.microsoft.com/office/powerpoint/2010/main" Requires="p159">
+      <p:transition p14:dur="500" advClick="1"/>
+    </mc:Choice>
+    <mc:Fallback>
+      <p:transition advClick="1"/>
+    </mc:Fallback>
+  </mc:AlternateContent>
 </p:sld>
 </file>
 
 <file path=ppt/slides/slide2.xml><?xml version="1.0" encoding="utf-8"?>
-<p:sld xmlns:a="http://schemas.openxmlformats.org/drawingml/2006/main" xmlns:r="http://schemas.openxmlformats.org/officeDocument/2006/relationships" xmlns:p="http://schemas.openxmlformats.org/presentationml/2006/main">
-  <p:cSld>
+<p:sld xmlns:a="http://schemas.openxmlformats.org/drawingml/2006/main" xmlns:r="http://schemas.openxmlformats.org/officeDocument/2006/relationships" xmlns:p="http://schemas.openxmlformats.org/presentationml/2006/main" xmlns:m="http://schemas.openxmlformats.org/officeDocument/2006/math" xmlns:w="http://schemas.openxmlformats.org/wordprocessingml/2006/main" xmlns:mc="http://schemas.openxmlformats.org/markup-compatibility/2006" showMasterPhAnim="0" showMasterSp="1" show="1">
+  <p:cSld name="">
     <p:spTree>
       <p:nvGrpSpPr>
         <p:cNvPr id="1" name=""/>
         <p:cNvGrpSpPr/>
         <p:nvPr/>
       </p:nvGrpSpPr>
-      <p:grpSpPr>
+      <p:grpSpPr bwMode="auto">
         <a:xfrm>
           <a:off x="0" y="0"/>
           <a:ext cx="0" cy="0"/>
@@ -3041,7 +3919,7 @@
       </p:grpSpPr>
       <p:sp>
         <p:nvSpPr>
-          <p:cNvPr id="2" name="Title 1"/>
+          <p:cNvPr id="749239278" name="Title 1"/>
           <p:cNvSpPr>
             <a:spLocks noGrp="1"/>
           </p:cNvSpPr>
@@ -3049,29 +3927,28 @@
             <p:ph type="title"/>
           </p:nvPr>
         </p:nvSpPr>
-        <p:spPr/>
-        <p:txBody>
-          <a:bodyPr/>
-          <a:lstStyle/>
-          <a:p>
-            <a:r>
-              <a:rPr lang="en-US" b="1" dirty="0" smtClean="0"/>
+        <p:spPr bwMode="auto"/>
+        <p:txBody>
+          <a:bodyPr/>
+          <a:lstStyle/>
+          <a:p>
+            <a:pPr>
+              <a:defRPr/>
+            </a:pPr>
+            <a:r>
+              <a:rPr lang="en-US" b="1"/>
               <a:t>Concept:</a:t>
             </a:r>
-            <a:r>
-              <a:rPr lang="en-US" dirty="0" smtClean="0"/>
-              <a:t/>
-            </a:r>
             <a:br>
-              <a:rPr lang="en-US" dirty="0" smtClean="0"/>
+              <a:rPr lang="en-US"/>
             </a:br>
-            <a:endParaRPr lang="en-US" dirty="0"/>
-          </a:p>
-        </p:txBody>
-      </p:sp>
-      <p:sp>
-        <p:nvSpPr>
-          <p:cNvPr id="3" name="Content Placeholder 2"/>
+            <a:endParaRPr lang="en-US"/>
+          </a:p>
+        </p:txBody>
+      </p:sp>
+      <p:sp>
+        <p:nvSpPr>
+          <p:cNvPr id="1924766989" name="Content Placeholder 2"/>
           <p:cNvSpPr>
             <a:spLocks noGrp="1"/>
           </p:cNvSpPr>
@@ -3079,96 +3956,120 @@
             <p:ph idx="1"/>
           </p:nvPr>
         </p:nvSpPr>
-        <p:spPr/>
+        <p:spPr bwMode="auto"/>
         <p:txBody>
           <a:bodyPr>
             <a:normAutofit fontScale="92500"/>
           </a:bodyPr>
           <a:lstStyle/>
           <a:p>
-            <a:r>
-              <a:rPr lang="en-US" b="1" dirty="0" smtClean="0"/>
+            <a:pPr>
+              <a:defRPr/>
+            </a:pPr>
+            <a:r>
+              <a:rPr lang="en-US" b="1"/>
               <a:t>Material Dispersion:</a:t>
             </a:r>
             <a:r>
-              <a:rPr lang="en-US" dirty="0" smtClean="0"/>
+              <a:rPr lang="en-US"/>
               <a:t> This occurs because the refractive index of glass varies with the wavelength of light. </a:t>
             </a:r>
-          </a:p>
-          <a:p>
-            <a:pPr lvl="1"/>
-            <a:r>
-              <a:rPr lang="en-US" dirty="0" smtClean="0"/>
+            <a:endParaRPr/>
+          </a:p>
+          <a:p>
+            <a:pPr lvl="1">
+              <a:defRPr/>
+            </a:pPr>
+            <a:r>
+              <a:rPr lang="en-US"/>
               <a:t>Since an LED light source isn't "pure" (it contains a range of wavelengths/colors), different colors travel at different speeds through the fiber.</a:t>
             </a:r>
-          </a:p>
-          <a:p>
-            <a:r>
-              <a:rPr lang="en-US" b="1" dirty="0" smtClean="0"/>
+            <a:endParaRPr/>
+          </a:p>
+          <a:p>
+            <a:pPr>
+              <a:defRPr/>
+            </a:pPr>
+            <a:r>
+              <a:rPr lang="en-US" b="1"/>
               <a:t>Pulse Broadening:</a:t>
             </a:r>
             <a:r>
-              <a:rPr lang="en-US" dirty="0" smtClean="0"/>
+              <a:rPr lang="en-US"/>
               <a:t> As these different speeds cause parts of the light pulse to arrive at different times, the pulse "spreads out" or broadens as it travels.</a:t>
             </a:r>
-          </a:p>
-          <a:p>
-            <a:r>
-              <a:rPr lang="en-US" b="1" dirty="0" err="1" smtClean="0"/>
+            <a:endParaRPr/>
+          </a:p>
+          <a:p>
+            <a:pPr>
+              <a:defRPr/>
+            </a:pPr>
+            <a:r>
+              <a:rPr lang="en-US" b="1"/>
               <a:t>Intersymbol</a:t>
             </a:r>
             <a:r>
-              <a:rPr lang="en-US" b="1" dirty="0" smtClean="0"/>
+              <a:rPr lang="en-US" b="1"/>
               <a:t> Interference (ISI):</a:t>
             </a:r>
             <a:r>
-              <a:rPr lang="en-US" dirty="0" smtClean="0"/>
+              <a:rPr lang="en-US"/>
               <a:t> For CSE students, the practical impact is </a:t>
             </a:r>
             <a:r>
-              <a:rPr lang="en-US" b="1" dirty="0" smtClean="0"/>
+              <a:rPr lang="en-US" b="1"/>
               <a:t>ISI</a:t>
             </a:r>
             <a:r>
-              <a:rPr lang="en-US" dirty="0" smtClean="0"/>
+              <a:rPr lang="en-US"/>
               <a:t>. If a pulse broadens too much, it starts overlapping with the pulse representing the next bit. </a:t>
             </a:r>
-          </a:p>
-          <a:p>
-            <a:pPr lvl="1"/>
-            <a:r>
-              <a:rPr lang="en-US" dirty="0" smtClean="0"/>
+            <a:endParaRPr/>
+          </a:p>
+          <a:p>
+            <a:pPr lvl="1">
+              <a:defRPr/>
+            </a:pPr>
+            <a:r>
+              <a:rPr lang="en-US"/>
               <a:t>The receiver then cannot distinguish between a "1" and a "0".</a:t>
             </a:r>
-          </a:p>
-          <a:p>
-            <a:endParaRPr lang="en-US" dirty="0"/>
+            <a:endParaRPr/>
+          </a:p>
+          <a:p>
+            <a:pPr>
+              <a:defRPr/>
+            </a:pPr>
+            <a:endParaRPr lang="en-US"/>
           </a:p>
         </p:txBody>
       </p:sp>
     </p:spTree>
-    <p:extLst>
-      <p:ext uri="{BB962C8B-B14F-4D97-AF65-F5344CB8AC3E}">
-        <p14:creationId xmlns:p14="http://schemas.microsoft.com/office/powerpoint/2010/main" val="1780965630"/>
-      </p:ext>
-    </p:extLst>
   </p:cSld>
   <p:clrMapOvr>
     <a:masterClrMapping/>
   </p:clrMapOvr>
+  <mc:AlternateContent xmlns:mc="http://schemas.openxmlformats.org/markup-compatibility/2006">
+    <mc:Choice xmlns:p159="http://schemas.microsoft.com/office/powerpoint/2015/09/main" xmlns:p14="http://schemas.microsoft.com/office/powerpoint/2010/main" Requires="p159">
+      <p:transition p14:dur="500" advClick="1"/>
+    </mc:Choice>
+    <mc:Fallback>
+      <p:transition advClick="1"/>
+    </mc:Fallback>
+  </mc:AlternateContent>
 </p:sld>
 </file>
 
 <file path=ppt/slides/slide3.xml><?xml version="1.0" encoding="utf-8"?>
-<p:sld xmlns:a="http://schemas.openxmlformats.org/drawingml/2006/main" xmlns:r="http://schemas.openxmlformats.org/officeDocument/2006/relationships" xmlns:p="http://schemas.openxmlformats.org/presentationml/2006/main">
-  <p:cSld>
+<p:sld xmlns:a="http://schemas.openxmlformats.org/drawingml/2006/main" xmlns:r="http://schemas.openxmlformats.org/officeDocument/2006/relationships" xmlns:p="http://schemas.openxmlformats.org/presentationml/2006/main" xmlns:m="http://schemas.openxmlformats.org/officeDocument/2006/math" xmlns:w="http://schemas.openxmlformats.org/wordprocessingml/2006/main" xmlns:mc="http://schemas.openxmlformats.org/markup-compatibility/2006" showMasterPhAnim="0" showMasterSp="1" show="1">
+  <p:cSld name="">
     <p:spTree>
       <p:nvGrpSpPr>
         <p:cNvPr id="1" name=""/>
         <p:cNvGrpSpPr/>
         <p:nvPr/>
       </p:nvGrpSpPr>
-      <p:grpSpPr>
+      <p:grpSpPr bwMode="auto">
         <a:xfrm>
           <a:off x="0" y="0"/>
           <a:ext cx="0" cy="0"/>
@@ -3178,7 +4079,7 @@
       </p:grpSpPr>
       <p:sp>
         <p:nvSpPr>
-          <p:cNvPr id="2" name="Title 1"/>
+          <p:cNvPr id="459682857" name="Title 1"/>
           <p:cNvSpPr>
             <a:spLocks noGrp="1"/>
           </p:cNvSpPr>
@@ -3186,7 +4087,7 @@
             <p:ph type="title"/>
           </p:nvPr>
         </p:nvSpPr>
-        <p:spPr>
+        <p:spPr bwMode="auto">
           <a:xfrm>
             <a:off x="61546" y="365125"/>
             <a:ext cx="11292254" cy="1325563"/>
@@ -3196,48 +4097,138 @@
           <a:bodyPr/>
           <a:lstStyle/>
           <a:p>
-            <a:r>
-              <a:rPr lang="en-US" dirty="0" smtClean="0"/>
+            <a:pPr>
+              <a:defRPr/>
+            </a:pPr>
+            <a:r>
+              <a:rPr lang="en-US"/>
               <a:t>Exercise: Material Dispersion and Pulse Broadening</a:t>
             </a:r>
-            <a:endParaRPr lang="en-US" dirty="0"/>
-          </a:p>
-        </p:txBody>
-      </p:sp>
-      <p:sp>
-        <p:nvSpPr>
-          <p:cNvPr id="3" name="Content Placeholder 2"/>
-          <p:cNvSpPr>
-            <a:spLocks noGrp="1"/>
-          </p:cNvSpPr>
-          <p:nvPr>
-            <p:ph idx="1"/>
-          </p:nvPr>
-        </p:nvSpPr>
-        <p:spPr/>
-        <p:txBody>
-          <a:bodyPr/>
-          <a:lstStyle/>
-          <a:p>
-            <a:endParaRPr lang="en-US" dirty="0"/>
+            <a:endParaRPr lang="en-US"/>
           </a:p>
         </p:txBody>
       </p:sp>
       <p:pic>
         <p:nvPicPr>
-          <p:cNvPr id="4" name="Picture 3"/>
+          <p:cNvPr id="824569894" name="Picture 3"/>
           <p:cNvPicPr>
             <a:picLocks noChangeAspect="1"/>
           </p:cNvPicPr>
           <p:nvPr/>
         </p:nvPicPr>
-        <p:blipFill>
-          <a:blip r:embed="rId2"/>
-          <a:stretch>
-            <a:fillRect/>
-          </a:stretch>
+        <p:blipFill rotWithShape="1">
+          <a:blip r:embed="rId3"/>
+          <a:stretch/>
         </p:blipFill>
-        <p:spPr>
+        <p:spPr bwMode="auto">
+          <a:xfrm>
+            <a:off x="650364" y="2054369"/>
+            <a:ext cx="6759876" cy="2098797"/>
+          </a:xfrm>
+          <a:prstGeom prst="rect">
+            <a:avLst/>
+          </a:prstGeom>
+        </p:spPr>
+      </p:pic>
+      <p:pic>
+        <p:nvPicPr>
+          <p:cNvPr id="650504862" name="Picture 4"/>
+          <p:cNvPicPr>
+            <a:picLocks noChangeAspect="1"/>
+          </p:cNvPicPr>
+          <p:nvPr/>
+        </p:nvPicPr>
+        <p:blipFill rotWithShape="1">
+          <a:blip r:embed="rId4"/>
+          <a:stretch/>
+        </p:blipFill>
+        <p:spPr bwMode="auto">
+          <a:xfrm>
+            <a:off x="7465319" y="1625795"/>
+            <a:ext cx="4810873" cy="4395304"/>
+          </a:xfrm>
+          <a:prstGeom prst="rect">
+            <a:avLst/>
+          </a:prstGeom>
+        </p:spPr>
+      </p:pic>
+    </p:spTree>
+  </p:cSld>
+  <p:clrMapOvr>
+    <a:masterClrMapping/>
+  </p:clrMapOvr>
+  <mc:AlternateContent xmlns:mc="http://schemas.openxmlformats.org/markup-compatibility/2006">
+    <mc:Choice xmlns:p159="http://schemas.microsoft.com/office/powerpoint/2015/09/main" xmlns:p14="http://schemas.microsoft.com/office/powerpoint/2010/main" Requires="p159">
+      <p:transition p14:dur="500" advClick="1"/>
+    </mc:Choice>
+    <mc:Fallback>
+      <p:transition advClick="1"/>
+    </mc:Fallback>
+  </mc:AlternateContent>
+</p:sld>
+</file>
+
+<file path=ppt/slides/slide4.xml><?xml version="1.0" encoding="utf-8"?>
+<p:sld xmlns:a="http://schemas.openxmlformats.org/drawingml/2006/main" xmlns:r="http://schemas.openxmlformats.org/officeDocument/2006/relationships" xmlns:p="http://schemas.openxmlformats.org/presentationml/2006/main" xmlns:m="http://schemas.openxmlformats.org/officeDocument/2006/math" xmlns:w="http://schemas.openxmlformats.org/wordprocessingml/2006/main" xmlns:mc="http://schemas.openxmlformats.org/markup-compatibility/2006" showMasterPhAnim="0" showMasterSp="1" show="1">
+  <p:cSld name="">
+    <p:spTree>
+      <p:nvGrpSpPr>
+        <p:cNvPr id="1" name=""/>
+        <p:cNvGrpSpPr/>
+        <p:nvPr/>
+      </p:nvGrpSpPr>
+      <p:grpSpPr bwMode="auto">
+        <a:xfrm>
+          <a:off x="0" y="0"/>
+          <a:ext cx="0" cy="0"/>
+          <a:chOff x="0" y="0"/>
+          <a:chExt cx="0" cy="0"/>
+        </a:xfrm>
+      </p:grpSpPr>
+      <p:sp>
+        <p:nvSpPr>
+          <p:cNvPr id="30729925" name="Title 1"/>
+          <p:cNvSpPr>
+            <a:spLocks noGrp="1"/>
+          </p:cNvSpPr>
+          <p:nvPr>
+            <p:ph type="title"/>
+          </p:nvPr>
+        </p:nvSpPr>
+        <p:spPr bwMode="auto">
+          <a:xfrm>
+            <a:off x="61546" y="365125"/>
+            <a:ext cx="11292254" cy="1325563"/>
+          </a:xfrm>
+        </p:spPr>
+        <p:txBody>
+          <a:bodyPr/>
+          <a:lstStyle/>
+          <a:p>
+            <a:pPr>
+              <a:defRPr/>
+            </a:pPr>
+            <a:r>
+              <a:rPr lang="en-US"/>
+              <a:t>Exercise: Material Dispersion and Pulse Broadening</a:t>
+            </a:r>
+            <a:endParaRPr lang="en-US"/>
+          </a:p>
+        </p:txBody>
+      </p:sp>
+      <p:pic>
+        <p:nvPicPr>
+          <p:cNvPr id="1039626026" name="Picture 3"/>
+          <p:cNvPicPr>
+            <a:picLocks noChangeAspect="1"/>
+          </p:cNvPicPr>
+          <p:nvPr/>
+        </p:nvPicPr>
+        <p:blipFill rotWithShape="1">
+          <a:blip r:embed="rId3"/>
+          <a:stretch/>
+        </p:blipFill>
+        <p:spPr bwMode="auto">
           <a:xfrm>
             <a:off x="61547" y="1690688"/>
             <a:ext cx="6759876" cy="2098797"/>
@@ -3249,144 +4240,17 @@
       </p:pic>
       <p:pic>
         <p:nvPicPr>
-          <p:cNvPr id="5" name="Picture 4"/>
+          <p:cNvPr id="199538774" name="Picture 5"/>
           <p:cNvPicPr>
             <a:picLocks noChangeAspect="1"/>
           </p:cNvPicPr>
           <p:nvPr/>
         </p:nvPicPr>
-        <p:blipFill>
-          <a:blip r:embed="rId3"/>
-          <a:stretch>
-            <a:fillRect/>
-          </a:stretch>
+        <p:blipFill rotWithShape="1">
+          <a:blip r:embed="rId4"/>
+          <a:stretch/>
         </p:blipFill>
-        <p:spPr>
-          <a:xfrm>
-            <a:off x="7032365" y="1781659"/>
-            <a:ext cx="4810873" cy="4395304"/>
-          </a:xfrm>
-          <a:prstGeom prst="rect">
-            <a:avLst/>
-          </a:prstGeom>
-        </p:spPr>
-      </p:pic>
-    </p:spTree>
-    <p:extLst>
-      <p:ext uri="{BB962C8B-B14F-4D97-AF65-F5344CB8AC3E}">
-        <p14:creationId xmlns:p14="http://schemas.microsoft.com/office/powerpoint/2010/main" val="2165546419"/>
-      </p:ext>
-    </p:extLst>
-  </p:cSld>
-  <p:clrMapOvr>
-    <a:masterClrMapping/>
-  </p:clrMapOvr>
-</p:sld>
-</file>
-
-<file path=ppt/slides/slide4.xml><?xml version="1.0" encoding="utf-8"?>
-<p:sld xmlns:a="http://schemas.openxmlformats.org/drawingml/2006/main" xmlns:r="http://schemas.openxmlformats.org/officeDocument/2006/relationships" xmlns:p="http://schemas.openxmlformats.org/presentationml/2006/main">
-  <p:cSld>
-    <p:spTree>
-      <p:nvGrpSpPr>
-        <p:cNvPr id="1" name=""/>
-        <p:cNvGrpSpPr/>
-        <p:nvPr/>
-      </p:nvGrpSpPr>
-      <p:grpSpPr>
-        <a:xfrm>
-          <a:off x="0" y="0"/>
-          <a:ext cx="0" cy="0"/>
-          <a:chOff x="0" y="0"/>
-          <a:chExt cx="0" cy="0"/>
-        </a:xfrm>
-      </p:grpSpPr>
-      <p:sp>
-        <p:nvSpPr>
-          <p:cNvPr id="2" name="Title 1"/>
-          <p:cNvSpPr>
-            <a:spLocks noGrp="1"/>
-          </p:cNvSpPr>
-          <p:nvPr>
-            <p:ph type="title"/>
-          </p:nvPr>
-        </p:nvSpPr>
-        <p:spPr>
-          <a:xfrm>
-            <a:off x="61546" y="365125"/>
-            <a:ext cx="11292254" cy="1325563"/>
-          </a:xfrm>
-        </p:spPr>
-        <p:txBody>
-          <a:bodyPr/>
-          <a:lstStyle/>
-          <a:p>
-            <a:r>
-              <a:rPr lang="en-US" dirty="0" smtClean="0"/>
-              <a:t>Exercise: Material Dispersion and Pulse Broadening</a:t>
-            </a:r>
-            <a:endParaRPr lang="en-US" dirty="0"/>
-          </a:p>
-        </p:txBody>
-      </p:sp>
-      <p:sp>
-        <p:nvSpPr>
-          <p:cNvPr id="3" name="Content Placeholder 2"/>
-          <p:cNvSpPr>
-            <a:spLocks noGrp="1"/>
-          </p:cNvSpPr>
-          <p:nvPr>
-            <p:ph idx="1"/>
-          </p:nvPr>
-        </p:nvSpPr>
-        <p:spPr/>
-        <p:txBody>
-          <a:bodyPr/>
-          <a:lstStyle/>
-          <a:p>
-            <a:endParaRPr lang="en-US" dirty="0"/>
-          </a:p>
-        </p:txBody>
-      </p:sp>
-      <p:pic>
-        <p:nvPicPr>
-          <p:cNvPr id="4" name="Picture 3"/>
-          <p:cNvPicPr>
-            <a:picLocks noChangeAspect="1"/>
-          </p:cNvPicPr>
-          <p:nvPr/>
-        </p:nvPicPr>
-        <p:blipFill>
-          <a:blip r:embed="rId2"/>
-          <a:stretch>
-            <a:fillRect/>
-          </a:stretch>
-        </p:blipFill>
-        <p:spPr>
-          <a:xfrm>
-            <a:off x="61547" y="1690688"/>
-            <a:ext cx="6759876" cy="2098797"/>
-          </a:xfrm>
-          <a:prstGeom prst="rect">
-            <a:avLst/>
-          </a:prstGeom>
-        </p:spPr>
-      </p:pic>
-      <p:pic>
-        <p:nvPicPr>
-          <p:cNvPr id="6" name="Picture 5"/>
-          <p:cNvPicPr>
-            <a:picLocks noChangeAspect="1"/>
-          </p:cNvPicPr>
-          <p:nvPr/>
-        </p:nvPicPr>
-        <p:blipFill>
-          <a:blip r:embed="rId3"/>
-          <a:stretch>
-            <a:fillRect/>
-          </a:stretch>
-        </p:blipFill>
-        <p:spPr>
+        <p:spPr bwMode="auto">
           <a:xfrm>
             <a:off x="7129130" y="1825625"/>
             <a:ext cx="5001323" cy="3419952"/>
@@ -3397,20 +4261,23 @@
         </p:spPr>
       </p:pic>
     </p:spTree>
-    <p:extLst>
-      <p:ext uri="{BB962C8B-B14F-4D97-AF65-F5344CB8AC3E}">
-        <p14:creationId xmlns:p14="http://schemas.microsoft.com/office/powerpoint/2010/main" val="2795837899"/>
-      </p:ext>
-    </p:extLst>
   </p:cSld>
   <p:clrMapOvr>
     <a:masterClrMapping/>
   </p:clrMapOvr>
+  <mc:AlternateContent xmlns:mc="http://schemas.openxmlformats.org/markup-compatibility/2006">
+    <mc:Choice xmlns:p159="http://schemas.microsoft.com/office/powerpoint/2015/09/main" xmlns:p14="http://schemas.microsoft.com/office/powerpoint/2010/main" Requires="p159">
+      <p:transition p14:dur="500" advClick="1"/>
+    </mc:Choice>
+    <mc:Fallback>
+      <p:transition advClick="1"/>
+    </mc:Fallback>
+  </mc:AlternateContent>
 </p:sld>
 </file>
 
 <file path=ppt/theme/theme1.xml><?xml version="1.0" encoding="utf-8"?>
-<a:theme xmlns:a="http://schemas.openxmlformats.org/drawingml/2006/main" name="Office Theme">
+<a:theme xmlns:a="http://schemas.openxmlformats.org/drawingml/2006/main" xmlns:r="http://schemas.openxmlformats.org/officeDocument/2006/relationships" xmlns:p="http://schemas.openxmlformats.org/presentationml/2006/main" name="Office Theme">
   <a:themeElements>
     <a:clrScheme name="Office">
       <a:dk1>
@@ -3452,74 +4319,14 @@
     </a:clrScheme>
     <a:fontScheme name="Office">
       <a:majorFont>
-        <a:latin typeface="Calibri Light" panose="020F0302020204030204"/>
-        <a:ea typeface=""/>
-        <a:cs typeface=""/>
-        <a:font script="Jpan" typeface="游ゴシック Light"/>
-        <a:font script="Hang" typeface="맑은 고딕"/>
-        <a:font script="Hans" typeface="等线 Light"/>
-        <a:font script="Hant" typeface="新細明體"/>
-        <a:font script="Arab" typeface="Times New Roman"/>
-        <a:font script="Hebr" typeface="Times New Roman"/>
-        <a:font script="Thai" typeface="Angsana New"/>
-        <a:font script="Ethi" typeface="Nyala"/>
-        <a:font script="Beng" typeface="Vrinda"/>
-        <a:font script="Gujr" typeface="Shruti"/>
-        <a:font script="Khmr" typeface="MoolBoran"/>
-        <a:font script="Knda" typeface="Tunga"/>
-        <a:font script="Guru" typeface="Raavi"/>
-        <a:font script="Cans" typeface="Euphemia"/>
-        <a:font script="Cher" typeface="Plantagenet Cherokee"/>
-        <a:font script="Yiii" typeface="Microsoft Yi Baiti"/>
-        <a:font script="Tibt" typeface="Microsoft Himalaya"/>
-        <a:font script="Thaa" typeface="MV Boli"/>
-        <a:font script="Deva" typeface="Mangal"/>
-        <a:font script="Telu" typeface="Gautami"/>
-        <a:font script="Taml" typeface="Latha"/>
-        <a:font script="Syrc" typeface="Estrangelo Edessa"/>
-        <a:font script="Orya" typeface="Kalinga"/>
-        <a:font script="Mlym" typeface="Kartika"/>
-        <a:font script="Laoo" typeface="DokChampa"/>
-        <a:font script="Sinh" typeface="Iskoola Pota"/>
-        <a:font script="Mong" typeface="Mongolian Baiti"/>
-        <a:font script="Viet" typeface="Times New Roman"/>
-        <a:font script="Uigh" typeface="Microsoft Uighur"/>
-        <a:font script="Geor" typeface="Sylfaen"/>
+        <a:latin typeface="Calibri Light"/>
+        <a:ea typeface="Arial"/>
+        <a:cs typeface="Arial"/>
       </a:majorFont>
       <a:minorFont>
-        <a:latin typeface="Calibri" panose="020F0502020204030204"/>
-        <a:ea typeface=""/>
-        <a:cs typeface=""/>
-        <a:font script="Jpan" typeface="游ゴシック"/>
-        <a:font script="Hang" typeface="맑은 고딕"/>
-        <a:font script="Hans" typeface="等线"/>
-        <a:font script="Hant" typeface="新細明體"/>
-        <a:font script="Arab" typeface="Arial"/>
-        <a:font script="Hebr" typeface="Arial"/>
-        <a:font script="Thai" typeface="Cordia New"/>
-        <a:font script="Ethi" typeface="Nyala"/>
-        <a:font script="Beng" typeface="Vrinda"/>
-        <a:font script="Gujr" typeface="Shruti"/>
-        <a:font script="Khmr" typeface="DaunPenh"/>
-        <a:font script="Knda" typeface="Tunga"/>
-        <a:font script="Guru" typeface="Raavi"/>
-        <a:font script="Cans" typeface="Euphemia"/>
-        <a:font script="Cher" typeface="Plantagenet Cherokee"/>
-        <a:font script="Yiii" typeface="Microsoft Yi Baiti"/>
-        <a:font script="Tibt" typeface="Microsoft Himalaya"/>
-        <a:font script="Thaa" typeface="MV Boli"/>
-        <a:font script="Deva" typeface="Mangal"/>
-        <a:font script="Telu" typeface="Gautami"/>
-        <a:font script="Taml" typeface="Latha"/>
-        <a:font script="Syrc" typeface="Estrangelo Edessa"/>
-        <a:font script="Orya" typeface="Kalinga"/>
-        <a:font script="Mlym" typeface="Kartika"/>
-        <a:font script="Laoo" typeface="DokChampa"/>
-        <a:font script="Sinh" typeface="Iskoola Pota"/>
-        <a:font script="Mong" typeface="Mongolian Baiti"/>
-        <a:font script="Viet" typeface="Arial"/>
-        <a:font script="Uigh" typeface="Microsoft Uighur"/>
-        <a:font script="Geor" typeface="Sylfaen"/>
+        <a:latin typeface="Calibri"/>
+        <a:ea typeface="Arial"/>
+        <a:cs typeface="Arial"/>
       </a:minorFont>
     </a:fontScheme>
     <a:fmtScheme name="Office">
@@ -3527,7 +4334,7 @@
         <a:solidFill>
           <a:schemeClr val="phClr"/>
         </a:solidFill>
-        <a:gradFill rotWithShape="1">
+        <a:gradFill>
           <a:gsLst>
             <a:gs pos="0">
               <a:schemeClr val="phClr">
@@ -3553,7 +4360,7 @@
           </a:gsLst>
           <a:lin ang="5400000" scaled="0"/>
         </a:gradFill>
-        <a:gradFill rotWithShape="1">
+        <a:gradFill>
           <a:gsLst>
             <a:gs pos="0">
               <a:schemeClr val="phClr">
@@ -3630,7 +4437,7 @@
             <a:satMod val="170000"/>
           </a:schemeClr>
         </a:solidFill>
-        <a:gradFill rotWithShape="1">
+        <a:gradFill>
           <a:gsLst>
             <a:gs pos="0">
               <a:schemeClr val="phClr">
@@ -3661,11 +4468,200 @@
     </a:fmtScheme>
   </a:themeElements>
   <a:objectDefaults/>
-  <a:extraClrSchemeLst/>
-  <a:extLst>
-    <a:ext uri="{05A4C25C-085E-4340-85A3-A5531E510DB2}">
-      <thm15:themeFamily xmlns:thm15="http://schemas.microsoft.com/office/thememl/2012/main" name="Office Theme" id="{62F939B6-93AF-4DB8-9C6B-D6C7DFDC589F}" vid="{4A3C46E8-61CC-4603-A589-7422A47A8E4A}"/>
-    </a:ext>
-  </a:extLst>
+</a:theme>
+</file>
+
+<file path=ppt/theme/theme2.xml><?xml version="1.0" encoding="utf-8"?>
+<a:theme xmlns:a="http://schemas.openxmlformats.org/drawingml/2006/main" xmlns:r="http://schemas.openxmlformats.org/officeDocument/2006/relationships" xmlns:p="http://schemas.openxmlformats.org/presentationml/2006/main" name="Office Theme">
+  <a:themeElements>
+    <a:clrScheme name="Office">
+      <a:dk1>
+        <a:sysClr val="windowText" lastClr="000000"/>
+      </a:dk1>
+      <a:lt1>
+        <a:sysClr val="window" lastClr="FFFFFF"/>
+      </a:lt1>
+      <a:dk2>
+        <a:srgbClr val="44546A"/>
+      </a:dk2>
+      <a:lt2>
+        <a:srgbClr val="E7E6E6"/>
+      </a:lt2>
+      <a:accent1>
+        <a:srgbClr val="5B9BD5"/>
+      </a:accent1>
+      <a:accent2>
+        <a:srgbClr val="ED7D31"/>
+      </a:accent2>
+      <a:accent3>
+        <a:srgbClr val="A5A5A5"/>
+      </a:accent3>
+      <a:accent4>
+        <a:srgbClr val="FFC000"/>
+      </a:accent4>
+      <a:accent5>
+        <a:srgbClr val="4472C4"/>
+      </a:accent5>
+      <a:accent6>
+        <a:srgbClr val="70AD47"/>
+      </a:accent6>
+      <a:hlink>
+        <a:srgbClr val="0563C1"/>
+      </a:hlink>
+      <a:folHlink>
+        <a:srgbClr val="954F72"/>
+      </a:folHlink>
+    </a:clrScheme>
+    <a:fontScheme name="">
+      <a:majorFont>
+        <a:latin typeface="Calibri Light"/>
+        <a:ea typeface="Arial"/>
+        <a:cs typeface="Arial"/>
+      </a:majorFont>
+      <a:minorFont>
+        <a:latin typeface="Calibri"/>
+        <a:ea typeface="Arial"/>
+        <a:cs typeface="Arial"/>
+      </a:minorFont>
+    </a:fontScheme>
+    <a:fmtScheme name="Office">
+      <a:fillStyleLst>
+        <a:solidFill>
+          <a:schemeClr val="phClr"/>
+        </a:solidFill>
+        <a:gradFill>
+          <a:gsLst>
+            <a:gs pos="0">
+              <a:schemeClr val="phClr">
+                <a:lumMod val="110000"/>
+                <a:satMod val="105000"/>
+                <a:tint val="67000"/>
+              </a:schemeClr>
+            </a:gs>
+            <a:gs pos="50000">
+              <a:schemeClr val="phClr">
+                <a:lumMod val="105000"/>
+                <a:satMod val="103000"/>
+                <a:tint val="73000"/>
+              </a:schemeClr>
+            </a:gs>
+            <a:gs pos="100000">
+              <a:schemeClr val="phClr">
+                <a:lumMod val="105000"/>
+                <a:satMod val="109000"/>
+                <a:tint val="81000"/>
+              </a:schemeClr>
+            </a:gs>
+          </a:gsLst>
+          <a:lin ang="5400000" scaled="0"/>
+        </a:gradFill>
+        <a:gradFill>
+          <a:gsLst>
+            <a:gs pos="0">
+              <a:schemeClr val="phClr">
+                <a:satMod val="103000"/>
+                <a:lumMod val="102000"/>
+                <a:tint val="94000"/>
+              </a:schemeClr>
+            </a:gs>
+            <a:gs pos="50000">
+              <a:schemeClr val="phClr">
+                <a:satMod val="110000"/>
+                <a:lumMod val="100000"/>
+                <a:shade val="100000"/>
+              </a:schemeClr>
+            </a:gs>
+            <a:gs pos="100000">
+              <a:schemeClr val="phClr">
+                <a:lumMod val="99000"/>
+                <a:satMod val="120000"/>
+                <a:shade val="78000"/>
+              </a:schemeClr>
+            </a:gs>
+          </a:gsLst>
+          <a:lin ang="5400000" scaled="0"/>
+        </a:gradFill>
+      </a:fillStyleLst>
+      <a:lnStyleLst>
+        <a:ln w="6350" cap="flat" cmpd="sng" algn="ctr">
+          <a:solidFill>
+            <a:schemeClr val="phClr"/>
+          </a:solidFill>
+          <a:prstDash val="solid"/>
+          <a:miter lim="800000"/>
+        </a:ln>
+        <a:ln w="12700" cap="flat" cmpd="sng" algn="ctr">
+          <a:solidFill>
+            <a:schemeClr val="phClr"/>
+          </a:solidFill>
+          <a:prstDash val="solid"/>
+          <a:miter lim="800000"/>
+        </a:ln>
+        <a:ln w="19050" cap="flat" cmpd="sng" algn="ctr">
+          <a:solidFill>
+            <a:schemeClr val="phClr"/>
+          </a:solidFill>
+          <a:prstDash val="solid"/>
+          <a:miter lim="800000"/>
+        </a:ln>
+      </a:lnStyleLst>
+      <a:effectStyleLst>
+        <a:effectStyle>
+          <a:effectLst/>
+        </a:effectStyle>
+        <a:effectStyle>
+          <a:effectLst/>
+        </a:effectStyle>
+        <a:effectStyle>
+          <a:effectLst>
+            <a:outerShdw blurRad="57150" dist="19050" dir="5400000" algn="ctr" rotWithShape="0">
+              <a:srgbClr val="000000">
+                <a:alpha val="63000"/>
+              </a:srgbClr>
+            </a:outerShdw>
+          </a:effectLst>
+        </a:effectStyle>
+      </a:effectStyleLst>
+      <a:bgFillStyleLst>
+        <a:solidFill>
+          <a:schemeClr val="phClr"/>
+        </a:solidFill>
+        <a:solidFill>
+          <a:schemeClr val="phClr">
+            <a:tint val="95000"/>
+            <a:satMod val="170000"/>
+          </a:schemeClr>
+        </a:solidFill>
+        <a:gradFill>
+          <a:gsLst>
+            <a:gs pos="0">
+              <a:schemeClr val="phClr">
+                <a:tint val="93000"/>
+                <a:satMod val="150000"/>
+                <a:shade val="98000"/>
+                <a:lumMod val="102000"/>
+              </a:schemeClr>
+            </a:gs>
+            <a:gs pos="50000">
+              <a:schemeClr val="phClr">
+                <a:tint val="98000"/>
+                <a:satMod val="130000"/>
+                <a:shade val="90000"/>
+                <a:lumMod val="103000"/>
+              </a:schemeClr>
+            </a:gs>
+            <a:gs pos="100000">
+              <a:schemeClr val="phClr">
+                <a:shade val="63000"/>
+                <a:satMod val="120000"/>
+              </a:schemeClr>
+            </a:gs>
+          </a:gsLst>
+          <a:lin ang="5400000" scaled="0"/>
+        </a:gradFill>
+      </a:bgFillStyleLst>
+    </a:fmtScheme>
+  </a:themeElements>
+  <a:objectDefaults/>
 </a:theme>
 </file>